--- a/decks/Microsoft Foundry Content-Understanding.pptx
+++ b/decks/Microsoft Foundry Content-Understanding.pptx
@@ -137,6 +137,456 @@
 </p:presentation>
 </file>
 
+<file path=ppt/revisionInfo.xml><?xml version="1.0" encoding="utf-8"?>
+<p1510:revInfo xmlns:a="http://schemas.openxmlformats.org/drawingml/2006/main" xmlns:r="http://schemas.openxmlformats.org/officeDocument/2006/relationships" xmlns:p1510="http://schemas.microsoft.com/office/powerpoint/2015/10/main">
+  <p1510:revLst>
+    <p1510:client id="{9E5F6272-E5CC-47A4-8D65-EA77167209E1}" v="3" dt="2026-10-14T14:12:20.595"/>
+  </p1510:revLst>
+</p1510:revInfo>
+</file>
+
+<file path=ppt/changesInfos/changesInfo1.xml><?xml version="1.0" encoding="utf-8"?>
+<pc:chgInfo xmlns:a="http://schemas.openxmlformats.org/drawingml/2006/main" xmlns:r="http://schemas.openxmlformats.org/officeDocument/2006/relationships" xmlns:ac="http://schemas.microsoft.com/office/drawing/2013/main/command" xmlns:pc="http://schemas.microsoft.com/office/powerpoint/2013/main/command">
+  <pc:docChgLst>
+    <pc:chgData clId="Web-{9E5F6272-E5CC-47A4-8D65-EA77167209E1}"/>
+    <pc:docChg chg="modSld">
+      <pc:chgData name="" userId="" providerId="" clId="Web-{9E5F6272-E5CC-47A4-8D65-EA77167209E1}" dt="2026-10-14T14:12:20.595" v="3" actId="34807"/>
+      <pc:docMkLst>
+        <pc:docMk/>
+      </pc:docMkLst>
+      <pc:sldChg chg="modNotesTx">
+        <pc:chgData name="" userId="" providerId="" clId="Web-{9E5F6272-E5CC-47A4-8D65-EA77167209E1}" dt="2026-10-14T14:10:08.967" v="0" actId="34807"/>
+        <pc:sldMkLst>
+          <pc:docMk/>
+          <pc:sldMk cId="0" sldId="256"/>
+        </pc:sldMkLst>
+      </pc:sldChg>
+      <pc:sldChg chg="modSp modNotesTx">
+        <pc:chgData name="" userId="" providerId="" clId="Web-{9E5F6272-E5CC-47A4-8D65-EA77167209E1}" dt="2026-10-14T14:10:08.967" v="0" actId="34807"/>
+        <pc:sldMkLst>
+          <pc:docMk/>
+          <pc:sldMk cId="0" sldId="257"/>
+        </pc:sldMkLst>
+        <pc:spChg chg="mod">
+          <ac:chgData name="" userId="" providerId="" clId="Web-{9E5F6272-E5CC-47A4-8D65-EA77167209E1}" dt="2026-10-14T14:10:08.967" v="0" actId="34807"/>
+          <ac:spMkLst>
+            <pc:docMk/>
+            <pc:sldMk cId="0" sldId="257"/>
+            <ac:spMk id="29" creationId="{00000000-0000-0000-0000-000000000000}"/>
+          </ac:spMkLst>
+        </pc:spChg>
+        <pc:spChg chg="mod">
+          <ac:chgData name="" userId="" providerId="" clId="Web-{9E5F6272-E5CC-47A4-8D65-EA77167209E1}" dt="2026-10-14T14:10:08.967" v="0" actId="34807"/>
+          <ac:spMkLst>
+            <pc:docMk/>
+            <pc:sldMk cId="0" sldId="257"/>
+            <ac:spMk id="35" creationId="{00000000-0000-0000-0000-000000000000}"/>
+          </ac:spMkLst>
+        </pc:spChg>
+      </pc:sldChg>
+      <pc:sldChg chg="modSp modNotesTx">
+        <pc:chgData name="" userId="" providerId="" clId="Web-{9E5F6272-E5CC-47A4-8D65-EA77167209E1}" dt="2026-10-14T14:10:11.451" v="1" actId="34807"/>
+        <pc:sldMkLst>
+          <pc:docMk/>
+          <pc:sldMk cId="0" sldId="258"/>
+        </pc:sldMkLst>
+        <pc:spChg chg="mod">
+          <ac:chgData name="" userId="" providerId="" clId="Web-{9E5F6272-E5CC-47A4-8D65-EA77167209E1}" dt="2026-10-14T14:10:08.967" v="0" actId="34807"/>
+          <ac:spMkLst>
+            <pc:docMk/>
+            <pc:sldMk cId="0" sldId="258"/>
+            <ac:spMk id="8" creationId="{00000000-0000-0000-0000-000000000000}"/>
+          </ac:spMkLst>
+        </pc:spChg>
+        <pc:spChg chg="mod">
+          <ac:chgData name="" userId="" providerId="" clId="Web-{9E5F6272-E5CC-47A4-8D65-EA77167209E1}" dt="2026-10-14T14:10:11.451" v="1" actId="34807"/>
+          <ac:spMkLst>
+            <pc:docMk/>
+            <pc:sldMk cId="0" sldId="258"/>
+            <ac:spMk id="10" creationId="{00000000-0000-0000-0000-000000000000}"/>
+          </ac:spMkLst>
+        </pc:spChg>
+        <pc:spChg chg="mod">
+          <ac:chgData name="" userId="" providerId="" clId="Web-{9E5F6272-E5CC-47A4-8D65-EA77167209E1}" dt="2026-10-14T14:10:08.967" v="0" actId="34807"/>
+          <ac:spMkLst>
+            <pc:docMk/>
+            <pc:sldMk cId="0" sldId="258"/>
+            <ac:spMk id="18" creationId="{00000000-0000-0000-0000-000000000000}"/>
+          </ac:spMkLst>
+        </pc:spChg>
+        <pc:spChg chg="mod">
+          <ac:chgData name="" userId="" providerId="" clId="Web-{9E5F6272-E5CC-47A4-8D65-EA77167209E1}" dt="2026-10-14T14:10:08.967" v="0" actId="34807"/>
+          <ac:spMkLst>
+            <pc:docMk/>
+            <pc:sldMk cId="0" sldId="258"/>
+            <ac:spMk id="25" creationId="{00000000-0000-0000-0000-000000000000}"/>
+          </ac:spMkLst>
+        </pc:spChg>
+        <pc:spChg chg="mod">
+          <ac:chgData name="" userId="" providerId="" clId="Web-{9E5F6272-E5CC-47A4-8D65-EA77167209E1}" dt="2026-10-14T14:10:08.967" v="0" actId="34807"/>
+          <ac:spMkLst>
+            <pc:docMk/>
+            <pc:sldMk cId="0" sldId="258"/>
+            <ac:spMk id="26" creationId="{00000000-0000-0000-0000-000000000000}"/>
+          </ac:spMkLst>
+        </pc:spChg>
+        <pc:spChg chg="mod">
+          <ac:chgData name="" userId="" providerId="" clId="Web-{9E5F6272-E5CC-47A4-8D65-EA77167209E1}" dt="2026-10-14T14:10:08.967" v="0" actId="34807"/>
+          <ac:spMkLst>
+            <pc:docMk/>
+            <pc:sldMk cId="0" sldId="258"/>
+            <ac:spMk id="34" creationId="{00000000-0000-0000-0000-000000000000}"/>
+          </ac:spMkLst>
+        </pc:spChg>
+      </pc:sldChg>
+      <pc:sldChg chg="modSp modNotesTx">
+        <pc:chgData name="" userId="" providerId="" clId="Web-{9E5F6272-E5CC-47A4-8D65-EA77167209E1}" dt="2026-10-14T14:10:08.967" v="0" actId="34807"/>
+        <pc:sldMkLst>
+          <pc:docMk/>
+          <pc:sldMk cId="0" sldId="259"/>
+        </pc:sldMkLst>
+        <pc:spChg chg="mod">
+          <ac:chgData name="" userId="" providerId="" clId="Web-{9E5F6272-E5CC-47A4-8D65-EA77167209E1}" dt="2026-10-14T14:10:08.967" v="0" actId="34807"/>
+          <ac:spMkLst>
+            <pc:docMk/>
+            <pc:sldMk cId="0" sldId="259"/>
+            <ac:spMk id="26" creationId="{00000000-0000-0000-0000-000000000000}"/>
+          </ac:spMkLst>
+        </pc:spChg>
+        <pc:spChg chg="mod">
+          <ac:chgData name="" userId="" providerId="" clId="Web-{9E5F6272-E5CC-47A4-8D65-EA77167209E1}" dt="2026-10-14T14:10:08.967" v="0" actId="34807"/>
+          <ac:spMkLst>
+            <pc:docMk/>
+            <pc:sldMk cId="0" sldId="259"/>
+            <ac:spMk id="41" creationId="{00000000-0000-0000-0000-000000000000}"/>
+          </ac:spMkLst>
+        </pc:spChg>
+        <pc:spChg chg="mod">
+          <ac:chgData name="" userId="" providerId="" clId="Web-{9E5F6272-E5CC-47A4-8D65-EA77167209E1}" dt="2026-10-14T14:10:08.967" v="0" actId="34807"/>
+          <ac:spMkLst>
+            <pc:docMk/>
+            <pc:sldMk cId="0" sldId="259"/>
+            <ac:spMk id="46" creationId="{00000000-0000-0000-0000-000000000000}"/>
+          </ac:spMkLst>
+        </pc:spChg>
+      </pc:sldChg>
+      <pc:sldChg chg="modSp modNotesTx">
+        <pc:chgData name="" userId="" providerId="" clId="Web-{9E5F6272-E5CC-47A4-8D65-EA77167209E1}" dt="2026-10-14T14:12:20.595" v="3" actId="34807"/>
+        <pc:sldMkLst>
+          <pc:docMk/>
+          <pc:sldMk cId="0" sldId="260"/>
+        </pc:sldMkLst>
+        <pc:spChg chg="mod">
+          <ac:chgData name="" userId="" providerId="" clId="Web-{9E5F6272-E5CC-47A4-8D65-EA77167209E1}" dt="2026-10-14T14:10:08.967" v="0" actId="34807"/>
+          <ac:spMkLst>
+            <pc:docMk/>
+            <pc:sldMk cId="0" sldId="260"/>
+            <ac:spMk id="4" creationId="{00000000-0000-0000-0000-000000000000}"/>
+          </ac:spMkLst>
+        </pc:spChg>
+        <pc:spChg chg="mod">
+          <ac:chgData name="" userId="" providerId="" clId="Web-{9E5F6272-E5CC-47A4-8D65-EA77167209E1}" dt="2026-10-14T14:10:08.967" v="0" actId="34807"/>
+          <ac:spMkLst>
+            <pc:docMk/>
+            <pc:sldMk cId="0" sldId="260"/>
+            <ac:spMk id="7" creationId="{00000000-0000-0000-0000-000000000000}"/>
+          </ac:spMkLst>
+        </pc:spChg>
+        <pc:spChg chg="mod">
+          <ac:chgData name="" userId="" providerId="" clId="Web-{9E5F6272-E5CC-47A4-8D65-EA77167209E1}" dt="2026-10-14T14:10:08.967" v="0" actId="34807"/>
+          <ac:spMkLst>
+            <pc:docMk/>
+            <pc:sldMk cId="0" sldId="260"/>
+            <ac:spMk id="29" creationId="{00000000-0000-0000-0000-000000000000}"/>
+          </ac:spMkLst>
+        </pc:spChg>
+        <pc:spChg chg="mod">
+          <ac:chgData name="" userId="" providerId="" clId="Web-{9E5F6272-E5CC-47A4-8D65-EA77167209E1}" dt="2026-10-14T14:12:20.595" v="3" actId="34807"/>
+          <ac:spMkLst>
+            <pc:docMk/>
+            <pc:sldMk cId="0" sldId="260"/>
+            <ac:spMk id="40" creationId="{00000000-0000-0000-0000-000000000000}"/>
+          </ac:spMkLst>
+        </pc:spChg>
+        <pc:spChg chg="mod">
+          <ac:chgData name="" userId="" providerId="" clId="Web-{9E5F6272-E5CC-47A4-8D65-EA77167209E1}" dt="2026-10-14T14:10:08.967" v="0" actId="34807"/>
+          <ac:spMkLst>
+            <pc:docMk/>
+            <pc:sldMk cId="0" sldId="260"/>
+            <ac:spMk id="44" creationId="{00000000-0000-0000-0000-000000000000}"/>
+          </ac:spMkLst>
+        </pc:spChg>
+      </pc:sldChg>
+      <pc:sldChg chg="modSp modNotesTx">
+        <pc:chgData name="" userId="" providerId="" clId="Web-{9E5F6272-E5CC-47A4-8D65-EA77167209E1}" dt="2026-10-14T14:10:08.967" v="0" actId="34807"/>
+        <pc:sldMkLst>
+          <pc:docMk/>
+          <pc:sldMk cId="0" sldId="261"/>
+        </pc:sldMkLst>
+        <pc:spChg chg="mod">
+          <ac:chgData name="" userId="" providerId="" clId="Web-{9E5F6272-E5CC-47A4-8D65-EA77167209E1}" dt="2026-10-14T14:10:08.967" v="0" actId="34807"/>
+          <ac:spMkLst>
+            <pc:docMk/>
+            <pc:sldMk cId="0" sldId="261"/>
+            <ac:spMk id="8" creationId="{00000000-0000-0000-0000-000000000000}"/>
+          </ac:spMkLst>
+        </pc:spChg>
+        <pc:spChg chg="mod">
+          <ac:chgData name="" userId="" providerId="" clId="Web-{9E5F6272-E5CC-47A4-8D65-EA77167209E1}" dt="2026-10-14T14:10:08.967" v="0" actId="34807"/>
+          <ac:spMkLst>
+            <pc:docMk/>
+            <pc:sldMk cId="0" sldId="261"/>
+            <ac:spMk id="23" creationId="{00000000-0000-0000-0000-000000000000}"/>
+          </ac:spMkLst>
+        </pc:spChg>
+        <pc:spChg chg="mod">
+          <ac:chgData name="" userId="" providerId="" clId="Web-{9E5F6272-E5CC-47A4-8D65-EA77167209E1}" dt="2026-10-14T14:10:08.967" v="0" actId="34807"/>
+          <ac:spMkLst>
+            <pc:docMk/>
+            <pc:sldMk cId="0" sldId="261"/>
+            <ac:spMk id="43" creationId="{00000000-0000-0000-0000-000000000000}"/>
+          </ac:spMkLst>
+        </pc:spChg>
+      </pc:sldChg>
+      <pc:sldChg chg="modSp modNotesTx">
+        <pc:chgData name="" userId="" providerId="" clId="Web-{9E5F6272-E5CC-47A4-8D65-EA77167209E1}" dt="2026-10-14T14:10:08.967" v="0" actId="34807"/>
+        <pc:sldMkLst>
+          <pc:docMk/>
+          <pc:sldMk cId="0" sldId="262"/>
+        </pc:sldMkLst>
+        <pc:spChg chg="mod">
+          <ac:chgData name="" userId="" providerId="" clId="Web-{9E5F6272-E5CC-47A4-8D65-EA77167209E1}" dt="2026-10-14T14:10:08.967" v="0" actId="34807"/>
+          <ac:spMkLst>
+            <pc:docMk/>
+            <pc:sldMk cId="0" sldId="262"/>
+            <ac:spMk id="3" creationId="{00000000-0000-0000-0000-000000000000}"/>
+          </ac:spMkLst>
+        </pc:spChg>
+      </pc:sldChg>
+      <pc:sldChg chg="modSp modNotesTx">
+        <pc:chgData name="" userId="" providerId="" clId="Web-{9E5F6272-E5CC-47A4-8D65-EA77167209E1}" dt="2026-10-14T14:10:08.967" v="0" actId="34807"/>
+        <pc:sldMkLst>
+          <pc:docMk/>
+          <pc:sldMk cId="0" sldId="263"/>
+        </pc:sldMkLst>
+        <pc:spChg chg="mod">
+          <ac:chgData name="" userId="" providerId="" clId="Web-{9E5F6272-E5CC-47A4-8D65-EA77167209E1}" dt="2026-10-14T14:10:08.967" v="0" actId="34807"/>
+          <ac:spMkLst>
+            <pc:docMk/>
+            <pc:sldMk cId="0" sldId="263"/>
+            <ac:spMk id="26" creationId="{00000000-0000-0000-0000-000000000000}"/>
+          </ac:spMkLst>
+        </pc:spChg>
+        <pc:spChg chg="mod">
+          <ac:chgData name="" userId="" providerId="" clId="Web-{9E5F6272-E5CC-47A4-8D65-EA77167209E1}" dt="2026-10-14T14:10:08.967" v="0" actId="34807"/>
+          <ac:spMkLst>
+            <pc:docMk/>
+            <pc:sldMk cId="0" sldId="263"/>
+            <ac:spMk id="33" creationId="{00000000-0000-0000-0000-000000000000}"/>
+          </ac:spMkLst>
+        </pc:spChg>
+        <pc:spChg chg="mod">
+          <ac:chgData name="" userId="" providerId="" clId="Web-{9E5F6272-E5CC-47A4-8D65-EA77167209E1}" dt="2026-10-14T14:10:08.967" v="0" actId="34807"/>
+          <ac:spMkLst>
+            <pc:docMk/>
+            <pc:sldMk cId="0" sldId="263"/>
+            <ac:spMk id="41" creationId="{00000000-0000-0000-0000-000000000000}"/>
+          </ac:spMkLst>
+        </pc:spChg>
+        <pc:spChg chg="mod">
+          <ac:chgData name="" userId="" providerId="" clId="Web-{9E5F6272-E5CC-47A4-8D65-EA77167209E1}" dt="2026-10-14T14:10:08.967" v="0" actId="34807"/>
+          <ac:spMkLst>
+            <pc:docMk/>
+            <pc:sldMk cId="0" sldId="263"/>
+            <ac:spMk id="46" creationId="{00000000-0000-0000-0000-000000000000}"/>
+          </ac:spMkLst>
+        </pc:spChg>
+        <pc:spChg chg="mod">
+          <ac:chgData name="" userId="" providerId="" clId="Web-{9E5F6272-E5CC-47A4-8D65-EA77167209E1}" dt="2026-10-14T14:10:08.967" v="0" actId="34807"/>
+          <ac:spMkLst>
+            <pc:docMk/>
+            <pc:sldMk cId="0" sldId="263"/>
+            <ac:spMk id="56" creationId="{00000000-0000-0000-0000-000000000000}"/>
+          </ac:spMkLst>
+        </pc:spChg>
+      </pc:sldChg>
+      <pc:sldChg chg="modSp modNotesTx">
+        <pc:chgData name="" userId="" providerId="" clId="Web-{9E5F6272-E5CC-47A4-8D65-EA77167209E1}" dt="2026-10-14T14:10:08.967" v="0" actId="34807"/>
+        <pc:sldMkLst>
+          <pc:docMk/>
+          <pc:sldMk cId="0" sldId="264"/>
+        </pc:sldMkLst>
+        <pc:spChg chg="mod">
+          <ac:chgData name="" userId="" providerId="" clId="Web-{9E5F6272-E5CC-47A4-8D65-EA77167209E1}" dt="2026-10-14T14:10:08.967" v="0" actId="34807"/>
+          <ac:spMkLst>
+            <pc:docMk/>
+            <pc:sldMk cId="0" sldId="264"/>
+            <ac:spMk id="8" creationId="{00000000-0000-0000-0000-000000000000}"/>
+          </ac:spMkLst>
+        </pc:spChg>
+        <pc:spChg chg="mod">
+          <ac:chgData name="" userId="" providerId="" clId="Web-{9E5F6272-E5CC-47A4-8D65-EA77167209E1}" dt="2026-10-14T14:10:08.967" v="0" actId="34807"/>
+          <ac:spMkLst>
+            <pc:docMk/>
+            <pc:sldMk cId="0" sldId="264"/>
+            <ac:spMk id="32" creationId="{00000000-0000-0000-0000-000000000000}"/>
+          </ac:spMkLst>
+        </pc:spChg>
+        <pc:spChg chg="mod">
+          <ac:chgData name="" userId="" providerId="" clId="Web-{9E5F6272-E5CC-47A4-8D65-EA77167209E1}" dt="2026-10-14T14:10:08.967" v="0" actId="34807"/>
+          <ac:spMkLst>
+            <pc:docMk/>
+            <pc:sldMk cId="0" sldId="264"/>
+            <ac:spMk id="60" creationId="{00000000-0000-0000-0000-000000000000}"/>
+          </ac:spMkLst>
+        </pc:spChg>
+      </pc:sldChg>
+      <pc:sldChg chg="modSp modNotesTx">
+        <pc:chgData name="" userId="" providerId="" clId="Web-{9E5F6272-E5CC-47A4-8D65-EA77167209E1}" dt="2026-10-14T14:10:08.967" v="0" actId="34807"/>
+        <pc:sldMkLst>
+          <pc:docMk/>
+          <pc:sldMk cId="0" sldId="265"/>
+        </pc:sldMkLst>
+        <pc:spChg chg="mod">
+          <ac:chgData name="" userId="" providerId="" clId="Web-{9E5F6272-E5CC-47A4-8D65-EA77167209E1}" dt="2026-10-14T14:10:08.967" v="0" actId="34807"/>
+          <ac:spMkLst>
+            <pc:docMk/>
+            <pc:sldMk cId="0" sldId="265"/>
+            <ac:spMk id="36" creationId="{00000000-0000-0000-0000-000000000000}"/>
+          </ac:spMkLst>
+        </pc:spChg>
+      </pc:sldChg>
+      <pc:sldChg chg="modSp modNotesTx">
+        <pc:chgData name="" userId="" providerId="" clId="Web-{9E5F6272-E5CC-47A4-8D65-EA77167209E1}" dt="2026-10-14T14:10:08.967" v="0" actId="34807"/>
+        <pc:sldMkLst>
+          <pc:docMk/>
+          <pc:sldMk cId="0" sldId="266"/>
+        </pc:sldMkLst>
+        <pc:spChg chg="mod">
+          <ac:chgData name="" userId="" providerId="" clId="Web-{9E5F6272-E5CC-47A4-8D65-EA77167209E1}" dt="2026-10-14T14:10:08.967" v="0" actId="34807"/>
+          <ac:spMkLst>
+            <pc:docMk/>
+            <pc:sldMk cId="0" sldId="266"/>
+            <ac:spMk id="13" creationId="{00000000-0000-0000-0000-000000000000}"/>
+          </ac:spMkLst>
+        </pc:spChg>
+        <pc:spChg chg="mod">
+          <ac:chgData name="" userId="" providerId="" clId="Web-{9E5F6272-E5CC-47A4-8D65-EA77167209E1}" dt="2026-10-14T14:10:08.967" v="0" actId="34807"/>
+          <ac:spMkLst>
+            <pc:docMk/>
+            <pc:sldMk cId="0" sldId="266"/>
+            <ac:spMk id="15" creationId="{00000000-0000-0000-0000-000000000000}"/>
+          </ac:spMkLst>
+        </pc:spChg>
+        <pc:spChg chg="mod">
+          <ac:chgData name="" userId="" providerId="" clId="Web-{9E5F6272-E5CC-47A4-8D65-EA77167209E1}" dt="2026-10-14T14:10:08.967" v="0" actId="34807"/>
+          <ac:spMkLst>
+            <pc:docMk/>
+            <pc:sldMk cId="0" sldId="266"/>
+            <ac:spMk id="19" creationId="{00000000-0000-0000-0000-000000000000}"/>
+          </ac:spMkLst>
+        </pc:spChg>
+        <pc:spChg chg="mod">
+          <ac:chgData name="" userId="" providerId="" clId="Web-{9E5F6272-E5CC-47A4-8D65-EA77167209E1}" dt="2026-10-14T14:10:08.967" v="0" actId="34807"/>
+          <ac:spMkLst>
+            <pc:docMk/>
+            <pc:sldMk cId="0" sldId="266"/>
+            <ac:spMk id="23" creationId="{00000000-0000-0000-0000-000000000000}"/>
+          </ac:spMkLst>
+        </pc:spChg>
+        <pc:spChg chg="mod">
+          <ac:chgData name="" userId="" providerId="" clId="Web-{9E5F6272-E5CC-47A4-8D65-EA77167209E1}" dt="2026-10-14T14:10:08.967" v="0" actId="34807"/>
+          <ac:spMkLst>
+            <pc:docMk/>
+            <pc:sldMk cId="0" sldId="266"/>
+            <ac:spMk id="24" creationId="{00000000-0000-0000-0000-000000000000}"/>
+          </ac:spMkLst>
+        </pc:spChg>
+        <pc:spChg chg="mod">
+          <ac:chgData name="" userId="" providerId="" clId="Web-{9E5F6272-E5CC-47A4-8D65-EA77167209E1}" dt="2026-10-14T14:10:08.967" v="0" actId="34807"/>
+          <ac:spMkLst>
+            <pc:docMk/>
+            <pc:sldMk cId="0" sldId="266"/>
+            <ac:spMk id="36" creationId="{00000000-0000-0000-0000-000000000000}"/>
+          </ac:spMkLst>
+        </pc:spChg>
+        <pc:spChg chg="mod">
+          <ac:chgData name="" userId="" providerId="" clId="Web-{9E5F6272-E5CC-47A4-8D65-EA77167209E1}" dt="2026-10-14T14:10:08.967" v="0" actId="34807"/>
+          <ac:spMkLst>
+            <pc:docMk/>
+            <pc:sldMk cId="0" sldId="266"/>
+            <ac:spMk id="47" creationId="{00000000-0000-0000-0000-000000000000}"/>
+          </ac:spMkLst>
+        </pc:spChg>
+        <pc:spChg chg="mod">
+          <ac:chgData name="" userId="" providerId="" clId="Web-{9E5F6272-E5CC-47A4-8D65-EA77167209E1}" dt="2026-10-14T14:10:08.967" v="0" actId="34807"/>
+          <ac:spMkLst>
+            <pc:docMk/>
+            <pc:sldMk cId="0" sldId="266"/>
+            <ac:spMk id="50" creationId="{00000000-0000-0000-0000-000000000000}"/>
+          </ac:spMkLst>
+        </pc:spChg>
+        <pc:spChg chg="mod">
+          <ac:chgData name="" userId="" providerId="" clId="Web-{9E5F6272-E5CC-47A4-8D65-EA77167209E1}" dt="2026-10-14T14:10:08.967" v="0" actId="34807"/>
+          <ac:spMkLst>
+            <pc:docMk/>
+            <pc:sldMk cId="0" sldId="266"/>
+            <ac:spMk id="54" creationId="{00000000-0000-0000-0000-000000000000}"/>
+          </ac:spMkLst>
+        </pc:spChg>
+        <pc:spChg chg="mod">
+          <ac:chgData name="" userId="" providerId="" clId="Web-{9E5F6272-E5CC-47A4-8D65-EA77167209E1}" dt="2026-10-14T14:10:08.967" v="0" actId="34807"/>
+          <ac:spMkLst>
+            <pc:docMk/>
+            <pc:sldMk cId="0" sldId="266"/>
+            <ac:spMk id="55" creationId="{00000000-0000-0000-0000-000000000000}"/>
+          </ac:spMkLst>
+        </pc:spChg>
+      </pc:sldChg>
+      <pc:sldChg chg="modSp modNotesTx">
+        <pc:chgData name="" userId="" providerId="" clId="Web-{9E5F6272-E5CC-47A4-8D65-EA77167209E1}" dt="2026-10-14T14:10:08.967" v="0" actId="34807"/>
+        <pc:sldMkLst>
+          <pc:docMk/>
+          <pc:sldMk cId="0" sldId="267"/>
+        </pc:sldMkLst>
+        <pc:spChg chg="mod">
+          <ac:chgData name="" userId="" providerId="" clId="Web-{9E5F6272-E5CC-47A4-8D65-EA77167209E1}" dt="2026-10-14T14:10:08.967" v="0" actId="34807"/>
+          <ac:spMkLst>
+            <pc:docMk/>
+            <pc:sldMk cId="0" sldId="267"/>
+            <ac:spMk id="24" creationId="{00000000-0000-0000-0000-000000000000}"/>
+          </ac:spMkLst>
+        </pc:spChg>
+        <pc:spChg chg="mod">
+          <ac:chgData name="" userId="" providerId="" clId="Web-{9E5F6272-E5CC-47A4-8D65-EA77167209E1}" dt="2026-10-14T14:10:08.967" v="0" actId="34807"/>
+          <ac:spMkLst>
+            <pc:docMk/>
+            <pc:sldMk cId="0" sldId="267"/>
+            <ac:spMk id="29" creationId="{00000000-0000-0000-0000-000000000000}"/>
+          </ac:spMkLst>
+        </pc:spChg>
+        <pc:spChg chg="mod">
+          <ac:chgData name="" userId="" providerId="" clId="Web-{9E5F6272-E5CC-47A4-8D65-EA77167209E1}" dt="2026-10-14T14:10:08.967" v="0" actId="34807"/>
+          <ac:spMkLst>
+            <pc:docMk/>
+            <pc:sldMk cId="0" sldId="267"/>
+            <ac:spMk id="34" creationId="{00000000-0000-0000-0000-000000000000}"/>
+          </ac:spMkLst>
+        </pc:spChg>
+        <pc:spChg chg="mod">
+          <ac:chgData name="" userId="" providerId="" clId="Web-{9E5F6272-E5CC-47A4-8D65-EA77167209E1}" dt="2026-10-14T14:10:08.967" v="0" actId="34807"/>
+          <ac:spMkLst>
+            <pc:docMk/>
+            <pc:sldMk cId="0" sldId="267"/>
+            <ac:spMk id="35" creationId="{00000000-0000-0000-0000-000000000000}"/>
+          </ac:spMkLst>
+        </pc:spChg>
+      </pc:sldChg>
+    </pc:docChg>
+  </pc:docChgLst>
+</pc:chgInfo>
+</file>
+
 <file path=ppt/notesMasters/notesMaster1.xml><?xml version="1.0" encoding="utf-8"?>
 <p:notesMaster xmlns:a="http://schemas.openxmlformats.org/drawingml/2006/main" xmlns:r="http://schemas.openxmlformats.org/officeDocument/2006/relationships" xmlns:p="http://schemas.openxmlformats.org/presentationml/2006/main">
   <p:cSld>
@@ -218,7 +668,7 @@
           </a:lstStyle>
           <a:p>
             <a:fld id="{E7151A7F-A218-400D-B2AA-FF76126F9EDB}" type="datetimeFigureOut">
-              <a:t>11/10/2026</a:t>
+              <a:t>10/14/2026</a:t>
             </a:fld>
             <a:endParaRPr lang="en-US"/>
           </a:p>
@@ -530,28 +980,20 @@
           <a:lstStyle/>
           <a:p>
             <a:r>
-              <a:t>This session covers Azure Content Understanding: what it does, how the pipeline is built, and where it sits against the two things customers most often confuse it with.</a:t>
-            </a:r>
-          </a:p>
-          <a:p>
-            <a:r>
-              <a:t>Three points of context before we start. First, the naming. Microsoft Learn does not use the label "version 2" anywhere. It uses API version strings. The names "1.0" and "2.0" appear only in the Foundry blog, so this deck states the API version wherever status matters, and I will be explicit about what is generally available and what is not.</a:t>
-            </a:r>
-          </a:p>
-          <a:p>
-            <a:r>
-              <a:t>Second, the status split. API 2025-11-01 is generally available and is the version for production. API 2026-06-01-preview carries the newest capabilities and has no service level agreement. That distinction runs through the whole deck.</a:t>
-            </a:r>
-          </a:p>
-          <a:p>
-            <a:r>
-              <a:t>Third, the branding. The service is now documented as Azure Content Understanding in Foundry Tools, and Azure Document Intelligence is now presented as part of it. That is a portfolio change, not a technical merge, and slide 8 explains exactly what it does and does not mean.</a:t>
-            </a:r>
-          </a:p>
-          <a:p>
-            <a:r>
-              <a:t>Likely question: does this replace Document Intelligence? No. Microsoft states no migration is required. Slide 8.</a:t>
-            </a:r>
+              <a:rPr lang="en-US"/>
+              <a:t>This session covers Azure Content Understanding: what the service does, how its pipeline is built, and where it sits against the two things customers most often confuse it with, Azure Document Intelligence and a standalone optical character recognition model.
+The session is aimed at solution architects, developers and technical decision makers, and its sources, the official documentation and the Foundry blog, were verified on 30 September 2026.
+Three points of context set the frame.
+First, the naming.
+The official documentation does not use the label "version 2" anywhere. It identifies releases by API version strings. The names "1.0" and "2.0" appear only in the Foundry blog. For that reason the deck states the API version wherever status matters, and the session is explicit about what is generally available and what is not.
+Second, the status split.
+API 2025-11-01 is generally available and is the version for production. API 2026-06-01-preview carries the newest capabilities and has no service level agreement. That distinction runs through the whole deck, and preview items are marked with an asterisk on the slides.
+Third, the branding.
+The service is now documented as Azure Content Understanding in Foundry Tools, and Azure Document Intelligence is now presented as part of it. This is a portfolio change, not a technical merge, and slide 10 explains exactly what it does and does not mean.
+A common question is whether Content Understanding replaces Document Intelligence. It does not: Microsoft states that no migration is required, and slide 10 covers the detail.
+The overall narrative is simple: Content Understanding turns documents, images, audio and video into structured data, and every capability in this session is presented together with the API version that carries it and its release status.</a:t>
+            </a:r>
+            <a:endParaRPr/>
           </a:p>
         </p:txBody>
       </p:sp>
@@ -620,28 +1062,23 @@
           <a:lstStyle/>
           <a:p>
             <a:r>
-              <a:t>The one takeaway: nothing has been retired, and no migration is required. Microsoft states that explicitly for anyone already running Document Intelligence in production — the APIs, endpoints, software development kits and billing are unchanged.</a:t>
-            </a:r>
-          </a:p>
-          <a:p>
-            <a:r>
-              <a:t>What has changed is the packaging. Document Intelligence is now presented as part of Content Understanding, and the Azure product page is titled that way. Read that as a portfolio decision. Technically these remain two services with two APIs, and the guidance in the lower half is Microsoft's own, published as a decision table.</a:t>
-            </a:r>
-          </a:p>
-          <a:p>
-            <a:r>
-              <a:t>Two rows deserve emphasis. First, inference: Content Understanding can return a value not written on the page, such as deriving a contract end date from a start date and a term. Document Intelligence cannot, by design. That is a governance difference as much as a capability one, because an inferred value needs a different review posture. Second, containers: if the requirement is on-premises or disconnected, Document Intelligence is the only option today.</a:t>
-            </a:r>
-          </a:p>
-          <a:p>
-            <a:r>
-              <a:t>One caveat to carry: the guidance page was last updated in June 2026 and predates the current preview, so it compares the generally available versions.</a:t>
-            </a:r>
-          </a:p>
-          <a:p>
-            <a:r>
-              <a:t>Likely question: will they eventually merge technically? Not announced. Plan on two services.</a:t>
-            </a:r>
+              <a:rPr lang="en-US"/>
+              <a:t>This slide compares Content Understanding with Azure Document Intelligence. Read the upper table row by row, then the lower band, which is Microsoft's own guidance on which to choose.
+The core idea is that nothing has been retired and no migration is required. Microsoft states that explicitly for customers already running Document Intelligence in production: the APIs, endpoints, software development kits and billing are unchanged.
+What has changed is the packaging. Document Intelligence is now presented as part of Content Understanding, and the Azure product page is titled that way. That is a portfolio decision. Technically these remain two services with two APIs.
+First, the criteria table.
+Content Understanding is best at complex, unstructured and multimodal content and inferred values, with fields described in plain language and the customer's own Foundry model deployments. Document Intelligence is best at deterministic, high-accuracy extraction from structured and templated forms, with prebuilt schemas or custom models trained on at least five labelled samples.
+Second, inference.
+Content Understanding can return a value not written on the page, such as deriving a contract end date from a start date and a term. Document Intelligence cannot, by design. This is a governance difference as much as a capability one, because an inferred value needs a different review posture.
+Third, containers.
+If the requirement is on-premises or disconnected, Document Intelligence is the only option today, because it runs in containers and Content Understanding is cloud only.
+Fourth, the published guidance.
+The lower half is Microsoft's own decision table: Content Understanding for reading text or layout only and for unstructured documents, Document Intelligence for standard structured forms and for on-premises or disconnected use.
+One caveat applies: the guidance page was last updated in June 2026 and predates the current preview, so it compares the generally available versions.
+A common question is whether the two will eventually merge technically. That has not been announced, so plans should assume two services.
+The key takeaway is that the brand has merged but the services have not: the choice between them follows Microsoft's published decision table, not the product name.</a:t>
+            </a:r>
+            <a:endParaRPr/>
           </a:p>
         </p:txBody>
       </p:sp>
@@ -710,23 +1147,19 @@
           <a:lstStyle/>
           <a:p>
             <a:r>
-              <a:t>The one takeaway, and it is the honest framing: these two things are not competing products, so a feature-by-feature scoreboard would mislead. One is a model that converts a file to text. The other is a configured pipeline that contains such a step.</a:t>
-            </a:r>
-          </a:p>
-          <a:p>
-            <a:r>
-              <a:t>An important caveat, and please say it rather than imply it: Microsoft publishes no comparison between Content Understanding and Mistral OCR. What is verifiable is that Mistral optical character recognition models sit in the Foundry model catalog as models sold directly by Azure, so both are procurable in the same place. Everything in the table is a structural difference drawn from each product's own documentation, not a Microsoft ranking.</a:t>
-            </a:r>
-          </a:p>
-          <a:p>
-            <a:r>
-              <a:t>The band in the middle resolves most of the confusion. Content Understanding has optical character recognition inside it: its read and layout analyzers require no language model, and Microsoft recommends them over Document Intelligence for plain reading. So the decision is not which vendor reads text better.</a:t>
-            </a:r>
-          </a:p>
-          <a:p>
-            <a:r>
-              <a:t>Likely question: can we start with reading only and add fields later? Yes — the same analyzer object gains a field schema without changing the calling pattern.</a:t>
-            </a:r>
+              <a:rPr lang="en-US"/>
+              <a:t>This slide compares Content Understanding with a standalone optical character recognition model, such as Mistral OCR. Read the table row by row, then the band in the middle.
+The core idea is that these are not competing products, so a feature-by-feature scoreboard would mislead. One is a model that converts a file to text. The other is a configured pipeline that contains such a step.
+First, an important caveat.
+Microsoft publishes no comparison between Content Understanding and Mistral OCR, and this should be stated explicitly rather than implied. What is verifiable is that Mistral optical character recognition models sit in the Foundry model catalog as models sold directly by Azure, so both can be procured in the same place. Everything in the table is a structural difference drawn from each product's own documentation, not a Microsoft ranking.
+Second, the structural differences.
+An OCR model is called once per file and returns text or Markdown with layout blocks; the application code then parses that text to find the values it needs, with no trust signal per value. Content Understanding is a named analyzer that returns the declared fields as typed JSON, with a confidence score and source region per field for documents, handles audio and video through one interface, and classifies, splits and routes mixed batches in one call. Agentic mode, in preview, adds reasoning over content.
+Third, the band in the middle.
+This resolves most of the confusion. Content Understanding has optical character recognition inside it: its read and layout analyzers require no language model, and Microsoft recommends them over Document Intelligence for plain reading. So the decision is not which vendor reads text better; it is whether only text is needed, or text plus a defined schema, a confidence score and routing.
+A common question is whether a project can start with reading only and add fields later. It can: the same analyzer object gains a field schema without changing the calling pattern.
+The key takeaway is that a standalone OCR model fits when text is all that is needed, and Content Understanding fits when the application needs named values it can act on and threshold.</a:t>
+            </a:r>
+            <a:endParaRPr/>
           </a:p>
         </p:txBody>
       </p:sp>
@@ -795,23 +1228,22 @@
           <a:lstStyle/>
           <a:p>
             <a:r>
-              <a:t>The one takeaway: the cost model has three parts and only two of them appear on this service's bill, which is the single most common surprise in a first invoice.</a:t>
-            </a:r>
-          </a:p>
-          <a:p>
-            <a:r>
-              <a:t>Read the billing rows carefully. Content extraction is metered per thousand pages, and the rate depends on the work actually performed rather than the analyzer you asked for — a digital document needing no optical character recognition is charged at the lowest tier even if you called a layout analyzer. Contextualization is metered per million tokens. The third part, model and embedding tokens, does not appear here at all: it lands on your own Foundry deployment.</a:t>
-            </a:r>
-          </a:p>
-          <a:p>
-            <a:r>
-              <a:t>On the constraints, two are easy to miss when designing. Confidence and grounding are supported for documents only, so a straight-through design over images or audio has no score to threshold on. And regional availability is twelve regions at the time of writing, with Microsoft's own pages inconsistent on the number, so confirm it against the region page rather than any summary.</a:t>
-            </a:r>
-          </a:p>
-          <a:p>
-            <a:r>
-              <a:t>Likely question: is there a published reference architecture? Yes, the multi-modal content processing pattern in the Azure Architecture Center, with a matching solution accelerator.</a:t>
-            </a:r>
+              <a:rPr lang="en-US"/>
+              <a:t>This slide lists the limits that shape a design, how the bill is assembled, and the sources behind this deck. Read it from top to bottom: constraints, the three billing parts, then the references.
+The core idea is that the cost model has three parts and only two of them appear on this service's bill, which is the single most common surprise in a first invoice.
+First, the constraints.
+Files can be up to 200 MB and 300 pages. An analyzer holds up to 1,000 fields, and classification supports up to 200 categories nested up to five levels. Throughput is 1,000 pages or images a minute, and four hours of audio or video. Two constraints are easy to miss. Confidence and grounding are supported for documents only, so a straight-through design over images or audio has no score to threshold on. And regional availability is twelve regions at the time of writing, but Microsoft's own pages are inconsistent on the number, so it should be confirmed against the region page rather than any summary before presenting or designing.
+Second, content extraction.
+It is metered per thousand pages, and the rate depends on the work actually performed rather than the analyzer requested. A digital document needing no optical character recognition is charged at the lowest tier even if a layout analyzer was called.
+Third, contextualization.
+It is metered per million tokens, with a higher rate for the preview advanced tier.
+Fourth, the model deployment.
+Language and embedding tokens do not appear on this service at all: they land on the customer's own Foundry deployment.
+Fifth, the sources.
+The lower section lists the official documentation pages behind the deck, the reference architecture and the Python samples repository. A common question is whether there is a published reference architecture. There is: the multi-modal content processing pattern in the Azure Architecture Center, with a matching solution accelerator.
+The key takeaway is that a cost estimate must add the customer's own model deployment to the two meters on this service, and that the regional list should be confirmed before any design is committed.</a:t>
+            </a:r>
+            <a:endParaRPr/>
           </a:p>
         </p:txBody>
       </p:sp>
@@ -880,28 +1312,20 @@
           <a:lstStyle/>
           <a:p>
             <a:r>
-              <a:t>The order is deliberate. Sections one and two describe the service as it is: what it does, and how a request actually flows through it. Those two sections are the foundation, and the architecture slide in section two is the one to spend time on.</a:t>
-            </a:r>
-          </a:p>
-          <a:p>
-            <a:r>
-              <a:t>Section three answers the question most people arrive with: what changed this year. The honest answer has two halves, because some changes landed in the generally available API and some are preview only, and mixing them up leads to production commitments that cannot be met.</a:t>
-            </a:r>
-          </a:p>
-          <a:p>
-            <a:r>
-              <a:t>Sections four and five are the decision material. The two comparison slides exist because these are the questions that come up in almost every architecture conversation: how does this differ from Document Intelligence, and how does it differ from simply calling an optical character recognition model.</a:t>
-            </a:r>
-          </a:p>
-          <a:p>
-            <a:r>
-              <a:t>If you have limited time, slides 5, 8 and 9 carry the session. Slide 5 is the architecture, and slides 8 and 9 are the comparisons.</a:t>
-            </a:r>
-          </a:p>
-          <a:p>
-            <a:r>
-              <a:t>Likely question: is there a sample repository? Yes, slide 10 names it, with a caveat about how current it is.</a:t>
-            </a:r>
+              <a:rPr lang="en-US"/>
+              <a:t>Today we will look at Azure Content Understanding in five sections.
+The order is deliberate. The first two sections describe the service as it is, what it does and how a request actually flows through it, and they are the foundation.
+We begin with what the service is, on slides 3 and 4: the problem it solves, where it sits in the platform, and the four content types it accepts.
+We then examine how it works, on slides 5 and 6: the analyzer pipeline end to end, and the request flow for both processing modes. The architecture slide in this section, slide 5, is the one to spend time on.
+The third section, on slides 7 to 9, answers the question most people arrive with: what changed this year. The honest answer has two halves, because some changes landed in the generally available API and some are preview only. Mixing them up leads to production commitments that cannot be met.
+The fourth section, on slides 10 and 11, is decision material. The two comparison slides exist because these questions come up in almost every architecture conversation: how the service differs from Azure Document Intelligence, and how it differs from simply calling an optical character recognition model.
+We close with running the service, on slide 12: limits, the three-part cost model, regional availability, and the sources behind this deck.
+Where time is short, slides 5, 10 and 11 carry the session. Slide 5 is the architecture, and slides 10 and 11 are the comparisons.
+A common question is whether there is a sample repository. There is: slide 12 names it, the Azure-Samples Python repository for Content Understanding.
+A note on naming applies throughout. The official documentation identifies releases by API version, not by a product version number. Where the deck says generally available, it means API 2025-11-01; where it says preview, it means API 2026-06-01-preview, which carries no service level agreement.
+The overall narrative is simple: understand the service and its pipeline, separate what is generally available from what is preview, choose between the neighbouring tools, and then plan for limits and cost.</a:t>
+            </a:r>
+            <a:endParaRPr/>
           </a:p>
         </p:txBody>
       </p:sp>
@@ -970,28 +1394,21 @@
           <a:lstStyle/>
           <a:p>
             <a:r>
-              <a:t>The one takeaway: the service exists to make unstructured content predictable enough to act on automatically.</a:t>
-            </a:r>
-          </a:p>
-          <a:p>
-            <a:r>
-              <a:t>Two terms need defining before we go further, because the rest of the deck depends on them. An analyzer is a named, reusable configuration object. It holds the extraction settings, the field schema you defined, and which models to use. You create it once and reuse it across every file of that type. Grounding means that for each value returned, the service also returns the region of the source content it came from, so a reviewer can see the evidence rather than trusting the answer.</a:t>
-            </a:r>
-          </a:p>
-          <a:p>
-            <a:r>
-              <a:t>The confidence score is the commercially interesting part. Microsoft describes the goal as straight-through processing with confidence scores: set a threshold, pass everything above it automatically, route the rest to a person. That threshold is where the saving comes from, and it is worth measuring on real documents before committing to a number.</a:t>
-            </a:r>
-          </a:p>
-          <a:p>
-            <a:r>
-              <a:t>Note the honest limit: confidence scores and grounding are supported for document files only, not for image, audio or video.</a:t>
-            </a:r>
-          </a:p>
-          <a:p>
-            <a:r>
-              <a:t>Likely question: do we need to train anything first? No. Field descriptions in plain language are enough to start, and labelled examples are optional afterwards.</a:t>
-            </a:r>
+              <a:rPr lang="en-US"/>
+              <a:t>This slide explains what the service does and the problem it solves. Read it as four pairs from left to right: a problem that existed before a service like this, and what the service provides instead.
+The core idea is that the service exists to make unstructured content predictable enough to act on automatically: one configured analyzer turns unstructured files into schema-shaped output with a confidence score per value.
+Two terms need defining first, because the rest of the deck depends on them. An analyzer is a named, reusable configuration object. It holds the extraction settings, the field schema the customer defined, and the models to use. It is created once and reused across every file of that type. Grounding means that for each value returned, the service also returns the region of the source content it came from, so a reviewer can see the evidence rather than trusting the answer.
+First, content in many shapes.
+Scanned PDFs, photographs, call recordings and video each used to need a different pipeline. One analyzer accepts all four content types with the same settings.
+Second, unpredictable output.
+Optical character recognition returns whatever text is on the page. Here, the customer names the fields in plain language and the service returns exactly those fields as typed JSON, alongside readable Markdown.
+Third, a measure of trust.
+This is the commercially interesting part. Microsoft describes the goal as straight-through processing with confidence scores: set a threshold, pass everything above it automatically, and route the rest to a person. That threshold is where the saving comes from, and it is worth measuring on real documents before committing to a number. The honest limit is that confidence scores and grounding are supported for document files only, not for image, audio or video.
+Fourth, no prompt engineering.
+A field description is the instruction. A common question is whether anything must be trained first. It need not be: plain-language field descriptions are enough to start, and labelled examples are optional afterwards.
+The key takeaway is that the service turns unstructured content into predictable values with a trust signal, so that automation can be decided per value rather than per document.</a:t>
+            </a:r>
+            <a:endParaRPr/>
           </a:p>
         </p:txBody>
       </p:sp>
@@ -1060,23 +1477,20 @@
           <a:lstStyle/>
           <a:p>
             <a:r>
-              <a:t>The one takeaway: this is one tool inside a Foundry resource, and the same analyzer handles all four content types rather than needing a separate service for each.</a:t>
-            </a:r>
-          </a:p>
-          <a:p>
-            <a:r>
-              <a:t>The Document Intelligence box on the right is the part that causes confusion, so state it precisely. Microsoft has brought Document Intelligence under the Content Understanding brand, and the Azure product page now titles it accordingly. But the documentation is explicit that if you are running Document Intelligence in production, your APIs, endpoints, software development kits and billing are unchanged, and no migration is required. The merge is at the portfolio and branding level. Technically they remain two services with two APIs, and slide 8 covers how to choose between them.</a:t>
-            </a:r>
-          </a:p>
-          <a:p>
-            <a:r>
-              <a:t>On outputs: the service returns both Markdown and typed JSON, and which one matters depends on the scenario. Retrieval and search pipelines consume the Markdown. Straight-through processing consumes the JSON fields, because those carry the confidence score and the source region.</a:t>
-            </a:r>
-          </a:p>
-          <a:p>
-            <a:r>
-              <a:t>Likely question: does it need its own resource? No. It is provisioned as part of a Microsoft Foundry resource, which also supplies identity and regional placement.</a:t>
-            </a:r>
+              <a:rPr lang="en-US"/>
+              <a:t>This slide shows where the service sits in the platform, what it accepts, what it produces and where the output goes. Read it from left to right: content in, the service, the outputs and their destinations.
+The core idea is that this is one tool inside a Microsoft Foundry resource, and the same analyzer handles all four content types rather than needing a separate service for each.
+First, the containing resource.
+A common question is whether the service needs its own resource. It does not: it is provisioned as part of a Microsoft Foundry resource, which also supplies its identity and regional placement.
+Second, the content it accepts.
+Documents cover printed and handwritten text, tables, selection marks, barcodes, formulas and figures. Images support schema-driven description and classification. Audio adds transcription, speaker separation and speaker role. Video adds transcription plus key frames and shot detection.
+Third, Azure Document Intelligence.
+This box causes the most confusion, so it should be stated precisely. Microsoft has brought Document Intelligence under the Content Understanding brand, and the Azure product page now titles it accordingly. However, the documentation is explicit that for customers running Document Intelligence in production, the APIs, endpoints, software development kits and billing are unchanged, and no migration is required. The merge is at the portfolio and branding level. Technically they remain two services with two APIs, and slide 10 covers how to choose between them.
+Fourth, the outputs and where they go.
+The service returns both Markdown and typed JSON, and which one matters depends on the scenario. Retrieval and search pipelines consume the Markdown; Azure AI Search has a built-in skill that does extraction and chunking in one step. Straight-through processing consumes the JSON fields, because those carry the confidence score and the source region. The same output gives predictable input to a Foundry agent or to the customer's own application code.
+The key takeaway is that one analyzer in one Foundry resource covers every content type, and Document Intelligence sits alongside it in the same family without any migration.</a:t>
+            </a:r>
+            <a:endParaRPr/>
           </a:p>
         </p:txBody>
       </p:sp>
@@ -1145,28 +1559,24 @@
           <a:lstStyle/>
           <a:p>
             <a:r>
-              <a:t>The one takeaway: there are two distinct stages doing very different work, and most misunderstandings come from collapsing them into one.</a:t>
-            </a:r>
-          </a:p>
-          <a:p>
-            <a:r>
-              <a:t>Walk the numbers. Step one, content extraction: optical character recognition reads printed and handwritten text, tables, selection marks such as checkboxes, barcodes and formulas, and transcribes speech. This stage is deterministic and needs no language model. Step two, segmentation: a long file is split into sections, and each can be routed to a different analyzer, so a mixed batch is classified and split in one call. Step three, field extraction produces your schema, and this is the stage that uses a language model. Step four, the output.</a:t>
-            </a:r>
-          </a:p>
-          <a:p>
-            <a:r>
-              <a:t>The contextualization layer beneath is worth naming explicitly because it is a separate line on your bill. It prepares the context sent to the model, normalises values such as dates into canonical form, and computes both the confidence score and the source region.</a:t>
-            </a:r>
-          </a:p>
-          <a:p>
-            <a:r>
-              <a:t>The models are yours. The analyzer names a model and the resource maps it to a deployment you own, which is also why provisioned throughput works.</a:t>
-            </a:r>
-          </a:p>
-          <a:p>
-            <a:r>
-              <a:t>Likely question: can we use it purely for optical character recognition? Yes, and slide 9 covers when that is the right choice.</a:t>
-            </a:r>
+              <a:rPr lang="en-US"/>
+              <a:t>This slide shows the analyzer pipeline: five stages between the file that is sent and the structured output that comes back. Read it from left to right, following the numbered stages, with the contextualization layer running underneath.
+The core idea is that two stages do very different work, content extraction and field extraction, and most misunderstandings come from collapsing them into one.
+First, the input.
+A file is referenced by URL or sent as bytes in the request body. The analyzer above the pipeline is the reusable configuration created once: extraction settings, the field schema, the Foundry models to use, prebuilt or custom.
+Second, content extraction.
+Optical character recognition reads printed and handwritten text, tables, selection marks such as checkboxes, barcodes and formulas, and speech is transcribed. This stage is deterministic and needs no language model. A common question is whether the service can be used purely for optical character recognition. It can, and slide 11 covers when that is the right choice.
+Third, segmentation.
+A long file is split into logical sections, and each section can be routed to a different analyzer, so a mixed batch is classified and split in one call.
+Fourth, field extraction.
+This stage produces the customer's schema, extracting, classifying or generating each field, and it is the stage that uses a language model.
+Fifth, the output.
+Markdown, plus typed JSON with a confidence score and a source per field.
+The contextualization layer beneath is worth naming explicitly, because it is a distinct billed component and a separate line on the bill, not part of the model cost. It prepares the context sent to the model, normalises values such as dates into canonical form, and computes both the confidence score and the source region.
+The models belong to the customer. The analyzer names a language model and an embedding model, and the resource maps each to a deployment the customer owns, which is also why provisioned throughput works.
+The architectural principle is a clear split of roles: deterministic extraction reads the content, the language model produces the fields, and the contextualization layer prepares the context and computes the trust signals in between.</a:t>
+            </a:r>
+            <a:endParaRPr/>
           </a:p>
         </p:txBody>
       </p:sp>
@@ -1235,28 +1645,20 @@
           <a:lstStyle/>
           <a:p>
             <a:r>
-              <a:t>The one takeaway: the synchronous path is a convenience for a narrow case, not a faster version of the service.</a:t>
-            </a:r>
-          </a:p>
-          <a:p>
-            <a:r>
-              <a:t>Walking the asynchronous flow. Your application posts to the analyze operation, referencing the file by URL or sending bytes directly. The service returns 202 Accepted with an operation location header. Poll that location until the status reads Succeeded, then read the result. One detail worth knowing: you can explicitly delete the result once retrieved, which matters when the content is sensitive.</a:t>
-            </a:r>
-          </a:p>
-          <a:p>
-            <a:r>
-              <a:t>The synchronous path, in preview, removes the polling. The reason to care is not speed: the content is processed in memory rather than stored by the service, which is sometimes the deciding factor in a privacy review. The trade-offs are real — documents only, no custom field schema, ten megabytes, the first five pages, and roughly fifty per cent more per page.</a:t>
-            </a:r>
-          </a:p>
-          <a:p>
-            <a:r>
-              <a:t>So the rule is simple. If you need your own fields, you are on the asynchronous path regardless.</a:t>
-            </a:r>
-          </a:p>
-          <a:p>
-            <a:r>
-              <a:t>Likely question: how long does asynchronous processing take? Not documented as a guaranteed figure. Measure it on your own documents, and note that the Azure AI Search integration times out at five minutes.</a:t>
-            </a:r>
+              <a:rPr lang="en-US"/>
+              <a:t>This slide shows the request flow and compares the two processing modes. Read it from top to bottom: the asynchronous path, the synchronous path, and the table that decides between them.
+The core idea is that the synchronous path is a convenience for a narrow case, not a faster version of the service.
+First, the asynchronous path.
+This is the generally available path, for all content types. The client application sends the analysis request, referencing the file by URL or sending its bytes directly. The service returns 202 Accepted with an operation location header. The application polls that location until the status reads Succeeded, then reads the result, Markdown plus fields. The result can also be deleted explicitly once retrieved, which matters when the content is sensitive.
+A common question is how long asynchronous processing takes. It is not documented as a guaranteed figure, so it should be measured on the customer's own documents; the Azure AI Search integration times out at five minutes.
+Second, the synchronous path.
+It is in preview and removes the polling: the result comes back in the response. The reason it matters is not speed. The content is processed in memory rather than stored by the service, and that is sometimes the deciding factor in a privacy review.
+Third, the trade-offs.
+The table makes the trade-offs concrete. The asynchronous path accepts documents, images, audio and video, supports field extraction with confidence and source, accepts up to 200 MB and 300 pages, and is charged at the standard page rate. The synchronous path accepts documents only, through the read and layout analyzers only, with no custom field schema, a limit of 10 MB and the first five pages, and costs roughly 50 per cent more per page.
+As with every preview item in the deck, the synchronous path carries no service level agreement.
+The key takeaway is that any design needing its own fields is on the asynchronous path regardless, and the synchronous path is chosen only when in-memory processing of text and layout is the actual requirement.</a:t>
+            </a:r>
+            <a:endParaRPr/>
           </a:p>
         </p:txBody>
       </p:sp>
@@ -1325,23 +1727,20 @@
           <a:lstStyle/>
           <a:p>
             <a:r>
-              <a:t>The one takeaway: the two columns carry different weight, and conflating them is how teams end up committing to something they cannot run in production.</a:t>
-            </a:r>
-          </a:p>
-          <a:p>
-            <a:r>
-              <a:t>The left column is generally available today — improvements you inherit without changing your code. The token reduction is worth stating plainly, because it lowers the bill on your own model deployment rather than the service meter. The caution underneath is equally practical: the smaller model variants lose confidence quality, so if your threshold depends on that score, do not economise there.</a:t>
-            </a:r>
-          </a:p>
-          <a:p>
-            <a:r>
-              <a:t>The right column is preview. Agentic mode is the headline and is genuinely new capability: it reasons over a document, performs calculations, validates against conditions. Two caveats belong in any plan. It is explicitly not a drop-in replacement for the retired pro mode — one file per request, no extracted fields. And it needs around four hundred thousand tokens per minute of capacity per job.</a:t>
-            </a:r>
-          </a:p>
-          <a:p>
-            <a:r>
-              <a:t>Likely question: when does the preview become generally available? Not published. Plan on the generally available API and evaluate the preview alongside it.</a:t>
-            </a:r>
+              <a:rPr lang="en-US"/>
+              <a:t>This slide compares what changed in 2026 in two columns: what landed in the generally available API and can be relied on, and what is preview only.
+The core idea is that the two columns carry different weight, and conflating them is how teams end up committing to something they cannot run in production.
+First, the generally available column, API 2025-11-01.
+These are improvements inherited without changing code. Analyzers can use the GPT-5 series, including the mini and nano variants, and existing provisioned throughput commitments apply. Merging extraction and grounding cut average inference tokens by up to 28 per cent, with accuracy up to 3 per cent better. That token reduction is worth stating plainly, because it lowers the bill on the customer's own model deployment rather than the service meter. The refreshed confidence model improved score accuracy by up to 14 per cent, measured by area under the ROC curve.
+The caution underneath is equally practical: confidence quality drops noticeably on the mini and nano variants, so where a threshold depends on the score, the model choice should not economise there.
+Second, the preview column, API 2026-06-01-preview.
+Agentic mode is the headline and is genuinely new capability: it reasons over a document, performs multi-step calculations and validates against conditions, and it replaces the retired pro mode. Alongside it are synchronous read and layout, advanced contextualization with up to 3.5 per cent better accuracy for up to 22 per cent fewer tokens at a higher rate, private training by distillation, classification enhancements, and signature detection, document metadata and new tax-form prebuilt analyzers.
+Third, the two caveats for agentic mode.
+It is explicitly not a drop-in replacement for pro mode: it takes one file per request and does not support extracted fields. And it needs around 400,000 tokens per minute of model capacity per job.
+A common question is when the preview becomes generally available. The date is not published, so plans should rest on the generally available API, with the preview evaluated alongside it.
+The key takeaway is to build on API 2025-11-01 and treat every preview capability as something to evaluate, not to commit to.</a:t>
+            </a:r>
+            <a:endParaRPr/>
           </a:p>
         </p:txBody>
       </p:sp>
@@ -1410,23 +1809,23 @@
           <a:lstStyle/>
           <a:p>
             <a:r>
-              <a:t>The one takeaway is in the dark band at the top. Standard extraction locates a value that is written somewhere on the page. Agentic mode is for answers that are not written anywhere and have to be constructed — a total that needs reconciling, a condition that needs checking, a relationship between a contract and its amendment.</a:t>
-            </a:r>
-          </a:p>
-          <a:p>
-            <a:r>
-              <a:t>Walking the flow. One input file goes in, and it may legitimately hold several related documents: Microsoft's own example is a contract with its appendix and the governing rules. The service then applies its highest reasoning effort across four capabilities — reading across separated parts, calculating derived values, validating against conditions you wrote into the field descriptions, and interpreting tables and figures as evidence. What comes out is the same typed schema a standard analyzer returns.</a:t>
-            </a:r>
-          </a:p>
-          <a:p>
-            <a:r>
-              <a:t>Two honest cautions. The cost is real: the advanced billing rate, more tokens, longer latency, and roughly four hundred thousand tokens a minute per job — a provisioning decision, not a detail. And Microsoft states plainly that this is not a replacement for human review.</a:t>
-            </a:r>
-          </a:p>
-          <a:p>
-            <a:r>
-              <a:t>Likely question: should we use it everywhere? No — for straightforward field extraction the standard analyzer is cheaper and faster.</a:t>
-            </a:r>
+              <a:rPr lang="en-US"/>
+              <a:t>This slide explains agentic mode, a preview capability, in detail. Read it from left to right: one input file, the reasoning stage, and the schema that comes out.
+The core idea is in the dark band at the top. Standard extraction locates a value that is written somewhere on the page. Agentic mode is for answers that are not written anywhere and have to be constructed: a total that needs reconciling, a condition that needs checking, a relationship between a contract and its amendment.
+First, the input.
+One input file goes in, and it may legitimately hold several related documents. Microsoft's own example is a contract with its appendix and the governing rules.
+Second, the reasoning.
+The service applies its highest reasoning effort across four capabilities: reading across separated parts of the file, calculating derived values, validating against conditions written into the field descriptions, and interpreting tables, figures and forms as evidence.
+Third, the output.
+What comes out is the same typed schema a standard analyzer returns; the reasoning is internal. It is turned on with one setting when the analyzer is created, config.workflow set to agentic, and the schema, the call and the result shape stay the same.
+Fourth, the cost.
+The cost is real: the higher advanced contextualization billing rate, more tokens on the customer's own deployment, typically longer latency, and roughly 400,000 tokens a minute per job. That capacity figure is a provisioning decision, not a detail.
+Fifth, the preview limits.
+It supports documents only and one input file per request, fields using the extract method are not supported, and labelled samples cannot improve it. Microsoft also states plainly that it is not a replacement for human review.
+A common question is whether agentic mode should be used everywhere. It should not: for straightforward field extraction the standard analyzer is cheaper and faster.
+The key takeaway is that agentic mode is worth its cost only where the answer must be built from evidence across a document, such as reconciling a financial report or checking a document against requirements.</a:t>
+            </a:r>
+            <a:endParaRPr/>
           </a:p>
         </p:txBody>
       </p:sp>
@@ -1495,28 +1894,24 @@
           <a:lstStyle/>
           <a:p>
             <a:r>
-              <a:t>The one takeaway: what changed is not how you correct an analyzer, but what it keeps afterwards.</a:t>
-            </a:r>
-          </a:p>
-          <a:p>
-            <a:r>
-              <a:t>The workflow across the top is identical in both API versions. Upload a document the analyzer got wrong. Auto label pre-fills the current analyzer's answers, so you edit rather than start from nothing. Correct what is wrong. Rebuild. On volume: one sample when templates barely vary, one per format when they do.</a:t>
-            </a:r>
-          </a:p>
-          <a:p>
-            <a:r>
-              <a:t>The table underneath is the preview change, and it matters for two different reasons. The privacy reason is the obvious one — the built analyzer neither contains nor needs your labelled documents at analysis time, so training data stops travelling with the artefact. Those documents stay in your own storage account, for design purposes. The second reason is cost: distilling the patterns rather than carrying the documents means fewer tokens on every analysis afterwards, on your own model deployment.</a:t>
-            </a:r>
-          </a:p>
-          <a:p>
-            <a:r>
-              <a:t>One limit for expectations: labelled samples teach layout and terminology but cannot fix character recognition errors. If a letter is misread as a digit, labelling it correctly will not help.</a:t>
-            </a:r>
-          </a:p>
-          <a:p>
-            <a:r>
-              <a:t>Likely question: does this replace agentic mode? No — they solve different problems, and agentic mode cannot use labelled samples at all.</a:t>
-            </a:r>
+              <a:rPr lang="en-US"/>
+              <a:t>This slide explains how an analyzer is improved with labelled examples, and what the preview changes. Read it from top to bottom: the correction workflow, then the table of what the built analyzer carries afterwards.
+The core idea is that what changed is not how an analyzer is corrected, but what it keeps afterwards.
+First, the correction workflow.
+The workflow is identical in both API versions. Upload a sample the analyzer got wrong. Auto label runs the current analyzer and pre-fills its answers, so the reviewer edits rather than starts from nothing. Correct the values that are wrong. Rebuild the analyzer so it uses the samples. On volume, one sample is enough when templates barely vary, and one per format is needed when they do. Quality should be evaluated before and after, to show whether the samples actually helped.
+Second, the preview change.
+The table underneath is the preview change, distilled training, and it matters for two different reasons.
+Third, privacy.
+The built analyzer neither contains nor needs the labelled documents at analysis time, so training data stops travelling with the artefact. Those documents stay in the customer's own storage account, in the Content Understanding Studio project, for design purposes only.
+Fourth, cost.
+Distilling the patterns rather than carrying the documents means fewer tokens on every analysis afterwards, on the customer's own model deployment.
+Fifth, the limits.
+Labelled samples teach layout and terminology but cannot fix character recognition errors. If a letter is misread as a digit, labelling it correctly will not help. The approach also does not apply to fields that use the generate method or to content other than documents.
+A common question is whether this replaces agentic mode. It does not: the two solve different problems, and agentic mode cannot use labelled samples at all.
+Labelled training exists in both API versions; only the distilled form is in preview, with no service level agreement.
+The key takeaway is that distillation keeps the same correction workflow while removing the labelled documents from the built analyzer, which helps both the privacy review and the token bill.</a:t>
+            </a:r>
+            <a:endParaRPr/>
           </a:p>
         </p:txBody>
       </p:sp>
@@ -1719,7 +2114,7 @@
           <a:p>
             <a:fld id="{5BCAD085-E8A6-8845-BD4E-CB4CCA059FC4}" type="datetimeFigureOut">
               <a:rPr lang="en-US" smtClean="0"/>
-              <a:t>10/11/2026</a:t>
+              <a:t>10/14/2026</a:t>
             </a:fld>
             <a:endParaRPr lang="en-US"/>
           </a:p>
@@ -1887,7 +2282,7 @@
           <a:p>
             <a:fld id="{5BCAD085-E8A6-8845-BD4E-CB4CCA059FC4}" type="datetimeFigureOut">
               <a:rPr lang="en-US" smtClean="0"/>
-              <a:t>10/11/2026</a:t>
+              <a:t>10/14/2026</a:t>
             </a:fld>
             <a:endParaRPr lang="en-US"/>
           </a:p>
@@ -2065,7 +2460,7 @@
           <a:p>
             <a:fld id="{5BCAD085-E8A6-8845-BD4E-CB4CCA059FC4}" type="datetimeFigureOut">
               <a:rPr lang="en-US" smtClean="0"/>
-              <a:t>10/11/2026</a:t>
+              <a:t>10/14/2026</a:t>
             </a:fld>
             <a:endParaRPr lang="en-US"/>
           </a:p>
@@ -2233,7 +2628,7 @@
           <a:p>
             <a:fld id="{5BCAD085-E8A6-8845-BD4E-CB4CCA059FC4}" type="datetimeFigureOut">
               <a:rPr lang="en-US" smtClean="0"/>
-              <a:t>10/11/2026</a:t>
+              <a:t>10/14/2026</a:t>
             </a:fld>
             <a:endParaRPr lang="en-US"/>
           </a:p>
@@ -2478,7 +2873,7 @@
           <a:p>
             <a:fld id="{5BCAD085-E8A6-8845-BD4E-CB4CCA059FC4}" type="datetimeFigureOut">
               <a:rPr lang="en-US" smtClean="0"/>
-              <a:t>10/11/2026</a:t>
+              <a:t>10/14/2026</a:t>
             </a:fld>
             <a:endParaRPr lang="en-US"/>
           </a:p>
@@ -2763,7 +3158,7 @@
           <a:p>
             <a:fld id="{5BCAD085-E8A6-8845-BD4E-CB4CCA059FC4}" type="datetimeFigureOut">
               <a:rPr lang="en-US" smtClean="0"/>
-              <a:t>10/11/2026</a:t>
+              <a:t>10/14/2026</a:t>
             </a:fld>
             <a:endParaRPr lang="en-US"/>
           </a:p>
@@ -3182,7 +3577,7 @@
           <a:p>
             <a:fld id="{5BCAD085-E8A6-8845-BD4E-CB4CCA059FC4}" type="datetimeFigureOut">
               <a:rPr lang="en-US" smtClean="0"/>
-              <a:t>10/11/2026</a:t>
+              <a:t>10/14/2026</a:t>
             </a:fld>
             <a:endParaRPr lang="en-US"/>
           </a:p>
@@ -3299,7 +3694,7 @@
           <a:p>
             <a:fld id="{5BCAD085-E8A6-8845-BD4E-CB4CCA059FC4}" type="datetimeFigureOut">
               <a:rPr lang="en-US" smtClean="0"/>
-              <a:t>10/11/2026</a:t>
+              <a:t>10/14/2026</a:t>
             </a:fld>
             <a:endParaRPr lang="en-US"/>
           </a:p>
@@ -3394,7 +3789,7 @@
           <a:p>
             <a:fld id="{5BCAD085-E8A6-8845-BD4E-CB4CCA059FC4}" type="datetimeFigureOut">
               <a:rPr lang="en-US" smtClean="0"/>
-              <a:t>10/11/2026</a:t>
+              <a:t>10/14/2026</a:t>
             </a:fld>
             <a:endParaRPr lang="en-US"/>
           </a:p>
@@ -3669,7 +4064,7 @@
           <a:p>
             <a:fld id="{5BCAD085-E8A6-8845-BD4E-CB4CCA059FC4}" type="datetimeFigureOut">
               <a:rPr lang="en-US" smtClean="0"/>
-              <a:t>10/11/2026</a:t>
+              <a:t>10/14/2026</a:t>
             </a:fld>
             <a:endParaRPr lang="en-US"/>
           </a:p>
@@ -3921,7 +4316,7 @@
           <a:p>
             <a:fld id="{5BCAD085-E8A6-8845-BD4E-CB4CCA059FC4}" type="datetimeFigureOut">
               <a:rPr lang="en-US" smtClean="0"/>
-              <a:t>10/11/2026</a:t>
+              <a:t>10/14/2026</a:t>
             </a:fld>
             <a:endParaRPr lang="en-US"/>
           </a:p>
@@ -4132,7 +4527,7 @@
           <a:p>
             <a:fld id="{5BCAD085-E8A6-8845-BD4E-CB4CCA059FC4}" type="datetimeFigureOut">
               <a:rPr lang="en-US" smtClean="0"/>
-              <a:t>10/11/2026</a:t>
+              <a:t>10/14/2026</a:t>
             </a:fld>
             <a:endParaRPr lang="en-US"/>
           </a:p>
@@ -6427,15 +6822,22 @@
               </a:lnSpc>
             </a:pPr>
             <a:r>
-              <a:rPr sz="850" b="0" i="0" dirty="0">
+              <a:rPr lang="en-US" sz="850" b="0" i="0" dirty="0">
                 <a:solidFill>
                   <a:srgbClr val="44495B"/>
                 </a:solidFill>
                 <a:latin typeface="Segoe UI"/>
                 <a:cs typeface="Segoe UI"/>
               </a:rPr>
-              <a:t>You bring your own Foundry model deployments</a:t>
-            </a:r>
+              <a:t>Customer-owned Foundry model deployments</a:t>
+            </a:r>
+            <a:endParaRPr sz="850" b="0" i="0" dirty="0">
+              <a:solidFill>
+                <a:srgbClr val="44495B"/>
+              </a:solidFill>
+              <a:latin typeface="Segoe UI"/>
+              <a:cs typeface="Segoe UI"/>
+            </a:endParaRPr>
           </a:p>
         </p:txBody>
       </p:sp>
@@ -7854,15 +8256,22 @@
               </a:lnSpc>
             </a:pPr>
             <a:r>
-              <a:rPr sz="850" b="1" i="0" dirty="0">
+              <a:rPr lang="en-US" sz="850" b="1" i="0" dirty="0">
                 <a:solidFill>
                   <a:srgbClr val="101A3C"/>
                 </a:solidFill>
                 <a:latin typeface="Segoe UI"/>
                 <a:cs typeface="Segoe UI"/>
               </a:rPr>
-              <a:t>What you call</a:t>
-            </a:r>
+              <a:t>What is called</a:t>
+            </a:r>
+            <a:endParaRPr sz="850" b="1" i="0" dirty="0">
+              <a:solidFill>
+                <a:srgbClr val="101A3C"/>
+              </a:solidFill>
+              <a:latin typeface="Segoe UI"/>
+              <a:cs typeface="Segoe UI"/>
+            </a:endParaRPr>
           </a:p>
         </p:txBody>
       </p:sp>
@@ -7934,15 +8343,22 @@
               </a:lnSpc>
             </a:pPr>
             <a:r>
-              <a:rPr sz="850" b="0" i="0" dirty="0">
+              <a:rPr lang="en-US" sz="850" b="0" i="0" dirty="0">
                 <a:solidFill>
                   <a:srgbClr val="44495B"/>
                 </a:solidFill>
                 <a:latin typeface="Segoe UI"/>
                 <a:cs typeface="Segoe UI"/>
               </a:rPr>
-              <a:t>A named analyzer you created, holding schema, settings and model choice</a:t>
-            </a:r>
+              <a:t>A named, pre-created analyzer holding schema, settings and model choice</a:t>
+            </a:r>
+            <a:endParaRPr sz="850" b="0" i="0" dirty="0">
+              <a:solidFill>
+                <a:srgbClr val="44495B"/>
+              </a:solidFill>
+              <a:latin typeface="Segoe UI"/>
+              <a:cs typeface="Segoe UI"/>
+            </a:endParaRPr>
           </a:p>
         </p:txBody>
       </p:sp>
@@ -8090,15 +8506,22 @@
               </a:lnSpc>
             </a:pPr>
             <a:r>
-              <a:rPr sz="850" b="0" i="0" dirty="0">
+              <a:rPr lang="en-US" sz="850" b="0" i="0" dirty="0">
                 <a:solidFill>
                   <a:srgbClr val="44495B"/>
                 </a:solidFill>
                 <a:latin typeface="Segoe UI"/>
                 <a:cs typeface="Segoe UI"/>
               </a:rPr>
-              <a:t>Markdown, plus typed JSON matching the schema you defined</a:t>
-            </a:r>
+              <a:t>Markdown, plus typed JSON matching the defined schema</a:t>
+            </a:r>
+            <a:endParaRPr sz="850" b="0" i="0" dirty="0">
+              <a:solidFill>
+                <a:srgbClr val="44495B"/>
+              </a:solidFill>
+              <a:latin typeface="Segoe UI"/>
+              <a:cs typeface="Segoe UI"/>
+            </a:endParaRPr>
           </a:p>
         </p:txBody>
       </p:sp>
@@ -8236,15 +8659,22 @@
               </a:lnSpc>
             </a:pPr>
             <a:r>
-              <a:rPr sz="850" b="0" i="0" dirty="0">
+              <a:rPr lang="en-US" sz="850" b="0" i="0" dirty="0">
                 <a:solidFill>
                   <a:srgbClr val="44495B"/>
                 </a:solidFill>
                 <a:latin typeface="Segoe UI"/>
                 <a:cs typeface="Segoe UI"/>
               </a:rPr>
-              <a:t>Your code parses the text to find the values it needs</a:t>
-            </a:r>
+              <a:t>Application code parses the text to find the values it needs</a:t>
+            </a:r>
+            <a:endParaRPr sz="850" b="0" i="0" dirty="0">
+              <a:solidFill>
+                <a:srgbClr val="44495B"/>
+              </a:solidFill>
+              <a:latin typeface="Segoe UI"/>
+              <a:cs typeface="Segoe UI"/>
+            </a:endParaRPr>
           </a:p>
         </p:txBody>
       </p:sp>
@@ -8276,15 +8706,22 @@
               </a:lnSpc>
             </a:pPr>
             <a:r>
-              <a:rPr sz="850" b="0" i="0" dirty="0">
+              <a:rPr lang="en-US" sz="850" b="0" i="0" dirty="0">
                 <a:solidFill>
                   <a:srgbClr val="44495B"/>
                 </a:solidFill>
                 <a:latin typeface="Segoe UI"/>
                 <a:cs typeface="Segoe UI"/>
               </a:rPr>
-              <a:t>You declare the fields; the service returns them</a:t>
-            </a:r>
+              <a:t>Fields are declared; the service returns them</a:t>
+            </a:r>
+            <a:endParaRPr sz="850" b="0" i="0" dirty="0">
+              <a:solidFill>
+                <a:srgbClr val="44495B"/>
+              </a:solidFill>
+              <a:latin typeface="Segoe UI"/>
+              <a:cs typeface="Segoe UI"/>
+            </a:endParaRPr>
           </a:p>
         </p:txBody>
       </p:sp>
@@ -8734,15 +9171,22 @@
               </a:lnSpc>
             </a:pPr>
             <a:r>
-              <a:rPr sz="850" b="0" i="0" dirty="0">
+              <a:rPr lang="en-US" sz="850" b="0" i="0" dirty="0">
                 <a:solidFill>
                   <a:srgbClr val="44495B"/>
                 </a:solidFill>
                 <a:latin typeface="Segoe UI"/>
                 <a:cs typeface="Segoe UI"/>
               </a:rPr>
-              <a:t>Handled by your own code</a:t>
-            </a:r>
+              <a:t>Handled by application code</a:t>
+            </a:r>
+            <a:endParaRPr sz="850" b="0" i="0" dirty="0">
+              <a:solidFill>
+                <a:srgbClr val="44495B"/>
+              </a:solidFill>
+              <a:latin typeface="Segoe UI"/>
+              <a:cs typeface="Segoe UI"/>
+            </a:endParaRPr>
           </a:p>
         </p:txBody>
       </p:sp>
@@ -9132,15 +9576,22 @@
               </a:lnSpc>
             </a:pPr>
             <a:r>
-              <a:rPr sz="900" b="0" i="0" dirty="0">
+              <a:rPr lang="en-US" sz="900" b="0" i="0" dirty="0">
                 <a:solidFill>
                   <a:srgbClr val="101A3C"/>
                 </a:solidFill>
                 <a:latin typeface="Segoe UI"/>
                 <a:cs typeface="Segoe UI"/>
               </a:rPr>
-              <a:t>These are not alternatives on the same axis. Content Understanding contains an optical character recognition stage — its read and layout analyzers need no language model at all. The real question is whether you need only text, or text plus a defined schema, a confidence score and routing.</a:t>
-            </a:r>
+              <a:t>These are not alternatives on the same axis. Content Understanding contains an optical character recognition stage — its read and layout analyzers need no language model at all. The real question is whether only text is needed, or text plus a defined schema, a confidence score and routing.</a:t>
+            </a:r>
+            <a:endParaRPr sz="900" b="0" i="0" dirty="0">
+              <a:solidFill>
+                <a:srgbClr val="101A3C"/>
+              </a:solidFill>
+              <a:latin typeface="Segoe UI"/>
+              <a:cs typeface="Segoe UI"/>
+            </a:endParaRPr>
           </a:p>
         </p:txBody>
       </p:sp>
@@ -9234,15 +9685,22 @@
               </a:lnSpc>
             </a:pPr>
             <a:r>
-              <a:rPr sz="900" b="1" i="0" dirty="0">
+              <a:rPr lang="en-US" sz="900" b="1" i="0" dirty="0">
                 <a:solidFill>
                   <a:srgbClr val="101A3C"/>
                 </a:solidFill>
                 <a:latin typeface="Segoe UI"/>
                 <a:cs typeface="Segoe UI"/>
               </a:rPr>
-              <a:t>Text is all you need</a:t>
-            </a:r>
+              <a:t>Text only</a:t>
+            </a:r>
+            <a:endParaRPr sz="900" b="1" i="0" dirty="0">
+              <a:solidFill>
+                <a:srgbClr val="101A3C"/>
+              </a:solidFill>
+              <a:latin typeface="Segoe UI"/>
+              <a:cs typeface="Segoe UI"/>
+            </a:endParaRPr>
           </a:p>
         </p:txBody>
       </p:sp>
@@ -9376,15 +9834,22 @@
               </a:lnSpc>
             </a:pPr>
             <a:r>
-              <a:rPr sz="900" b="1" i="0" dirty="0">
+              <a:rPr lang="en-US" sz="900" b="1" i="0" dirty="0">
                 <a:solidFill>
                   <a:srgbClr val="101A3C"/>
                 </a:solidFill>
                 <a:latin typeface="Segoe UI"/>
                 <a:cs typeface="Segoe UI"/>
               </a:rPr>
-              <a:t>You need named values you can act on</a:t>
-            </a:r>
+              <a:t>Named values to act on</a:t>
+            </a:r>
+            <a:endParaRPr sz="900" b="1" i="0" dirty="0">
+              <a:solidFill>
+                <a:srgbClr val="101A3C"/>
+              </a:solidFill>
+              <a:latin typeface="Segoe UI"/>
+              <a:cs typeface="Segoe UI"/>
+            </a:endParaRPr>
           </a:p>
         </p:txBody>
       </p:sp>
@@ -9416,15 +9881,22 @@
               </a:lnSpc>
             </a:pPr>
             <a:r>
-              <a:rPr sz="750" b="0" i="0" dirty="0">
+              <a:rPr lang="en-US" sz="750" b="0" i="0" dirty="0">
                 <a:solidFill>
                   <a:srgbClr val="44495B"/>
                 </a:solidFill>
                 <a:latin typeface="Segoe UI"/>
                 <a:cs typeface="Segoe UI"/>
               </a:rPr>
-              <a:t>Content Understanding returns your schema with a score you can threshold on.</a:t>
-            </a:r>
+              <a:t>Content Understanding returns the defined schema with a score to threshold on.</a:t>
+            </a:r>
+            <a:endParaRPr sz="750" b="0" i="0" dirty="0">
+              <a:solidFill>
+                <a:srgbClr val="44495B"/>
+              </a:solidFill>
+              <a:latin typeface="Segoe UI"/>
+              <a:cs typeface="Segoe UI"/>
+            </a:endParaRPr>
           </a:p>
         </p:txBody>
       </p:sp>
@@ -10381,15 +10853,22 @@
               </a:lnSpc>
             </a:pPr>
             <a:r>
-              <a:rPr sz="850" b="0" i="0" dirty="0">
+              <a:rPr lang="en-US" sz="850" b="0" i="0" dirty="0">
                 <a:solidFill>
                   <a:srgbClr val="44495B"/>
                 </a:solidFill>
                 <a:latin typeface="Segoe UI"/>
                 <a:cs typeface="Segoe UI"/>
               </a:rPr>
-              <a:t>12 at the time of writing; confirm before you design</a:t>
-            </a:r>
+              <a:t>12 at the time of writing; confirm before designing</a:t>
+            </a:r>
+            <a:endParaRPr sz="850" b="0" i="0" dirty="0">
+              <a:solidFill>
+                <a:srgbClr val="44495B"/>
+              </a:solidFill>
+              <a:latin typeface="Segoe UI"/>
+              <a:cs typeface="Segoe UI"/>
+            </a:endParaRPr>
           </a:p>
         </p:txBody>
       </p:sp>
@@ -10569,15 +11048,22 @@
               </a:lnSpc>
             </a:pPr>
             <a:r>
-              <a:rPr sz="750" b="0" i="0" dirty="0">
+              <a:rPr lang="en-US" sz="750" b="0" i="0" dirty="0">
                 <a:solidFill>
                   <a:srgbClr val="44495B"/>
                 </a:solidFill>
                 <a:latin typeface="Segoe UI"/>
                 <a:cs typeface="Segoe UI"/>
               </a:rPr>
-              <a:t>per 1,000 pages — the rate depends on the work actually done, not the analyzer you chose</a:t>
-            </a:r>
+              <a:t>per 1,000 pages — the rate depends on the work actually done, not the analyzer chosen</a:t>
+            </a:r>
+            <a:endParaRPr sz="750" b="0" i="0" dirty="0">
+              <a:solidFill>
+                <a:srgbClr val="44495B"/>
+              </a:solidFill>
+              <a:latin typeface="Segoe UI"/>
+              <a:cs typeface="Segoe UI"/>
+            </a:endParaRPr>
           </a:p>
         </p:txBody>
       </p:sp>
@@ -10753,15 +11239,22 @@
               </a:lnSpc>
             </a:pPr>
             <a:r>
-              <a:rPr sz="850" b="1" i="0" dirty="0">
+              <a:rPr lang="en-US" sz="850" b="1" i="0" dirty="0">
                 <a:solidFill>
                   <a:srgbClr val="101A3C"/>
                 </a:solidFill>
                 <a:latin typeface="Segoe UI"/>
                 <a:cs typeface="Segoe UI"/>
               </a:rPr>
-              <a:t>Your model deployment</a:t>
-            </a:r>
+              <a:t>Customer model deployment</a:t>
+            </a:r>
+            <a:endParaRPr sz="850" b="1" i="0" dirty="0">
+              <a:solidFill>
+                <a:srgbClr val="101A3C"/>
+              </a:solidFill>
+              <a:latin typeface="Segoe UI"/>
+              <a:cs typeface="Segoe UI"/>
+            </a:endParaRPr>
           </a:p>
         </p:txBody>
       </p:sp>
@@ -10793,15 +11286,22 @@
               </a:lnSpc>
             </a:pPr>
             <a:r>
-              <a:rPr sz="750" b="0" i="0" dirty="0">
+              <a:rPr lang="en-US" sz="750" b="0" i="0" dirty="0">
                 <a:solidFill>
                   <a:srgbClr val="44495B"/>
                 </a:solidFill>
                 <a:latin typeface="Segoe UI"/>
                 <a:cs typeface="Segoe UI"/>
               </a:rPr>
-              <a:t>language and embedding tokens are billed on your own Foundry deployment, not here</a:t>
-            </a:r>
+              <a:t>language and embedding tokens are billed on the customer’s own Foundry deployment, not here</a:t>
+            </a:r>
+            <a:endParaRPr sz="750" b="0" i="0" dirty="0">
+              <a:solidFill>
+                <a:srgbClr val="44495B"/>
+              </a:solidFill>
+              <a:latin typeface="Segoe UI"/>
+              <a:cs typeface="Segoe UI"/>
+            </a:endParaRPr>
           </a:p>
         </p:txBody>
       </p:sp>
@@ -13163,15 +13663,22 @@
               </a:lnSpc>
             </a:pPr>
             <a:r>
-              <a:rPr sz="750" b="1" i="0" dirty="0">
+              <a:rPr lang="en-US" sz="750" b="1" i="0" dirty="0">
                 <a:solidFill>
                   <a:srgbClr val="101A3C"/>
                 </a:solidFill>
                 <a:latin typeface="Segoe UI"/>
                 <a:cs typeface="Segoe UI"/>
               </a:rPr>
-              <a:t>Slides 8–9</a:t>
-            </a:r>
+              <a:t>Slides 10–11</a:t>
+            </a:r>
+            <a:endParaRPr sz="750" b="1" i="0" dirty="0">
+              <a:solidFill>
+                <a:srgbClr val="101A3C"/>
+              </a:solidFill>
+              <a:latin typeface="Segoe UI"/>
+              <a:cs typeface="Segoe UI"/>
+            </a:endParaRPr>
           </a:p>
         </p:txBody>
       </p:sp>
@@ -13423,15 +13930,22 @@
               </a:lnSpc>
             </a:pPr>
             <a:r>
-              <a:rPr sz="750" b="1" i="0" dirty="0">
+              <a:rPr lang="en-US" sz="750" b="1" i="0" dirty="0">
                 <a:solidFill>
                   <a:srgbClr val="101A3C"/>
                 </a:solidFill>
                 <a:latin typeface="Segoe UI"/>
                 <a:cs typeface="Segoe UI"/>
               </a:rPr>
-              <a:t>Slides 10</a:t>
-            </a:r>
+              <a:t>Slide 12</a:t>
+            </a:r>
+            <a:endParaRPr sz="750" b="1" i="0" dirty="0">
+              <a:solidFill>
+                <a:srgbClr val="101A3C"/>
+              </a:solidFill>
+              <a:latin typeface="Segoe UI"/>
+              <a:cs typeface="Segoe UI"/>
+            </a:endParaRPr>
           </a:p>
         </p:txBody>
       </p:sp>
@@ -13818,15 +14332,22 @@
               </a:lnSpc>
             </a:pPr>
             <a:r>
-              <a:rPr sz="1050" b="0" i="0" dirty="0">
+              <a:rPr lang="en-US" sz="1050" b="0" i="0" dirty="0">
                 <a:solidFill>
                   <a:srgbClr val="FFFFFF"/>
                 </a:solidFill>
                 <a:latin typeface="Segoe UI"/>
                 <a:cs typeface="Segoe UI"/>
               </a:rPr>
-              <a:t>A Foundry Tool that processes documents, images, audio and video into an output format you define — extracting, classifying or generating each field, and returning where in the content each value came from.</a:t>
-            </a:r>
+              <a:t>A Foundry Tool that processes documents, images, audio and video into a defined output format — extracting, classifying or generating each field, and returning where in the content each value came from.</a:t>
+            </a:r>
+            <a:endParaRPr sz="1050" b="0" i="0" dirty="0">
+              <a:solidFill>
+                <a:srgbClr val="FFFFFF"/>
+              </a:solidFill>
+              <a:latin typeface="Segoe UI"/>
+              <a:cs typeface="Segoe UI"/>
+            </a:endParaRPr>
           </a:p>
         </p:txBody>
       </p:sp>
@@ -13878,7 +14399,7 @@
         </p:nvSpPr>
         <p:spPr>
           <a:xfrm>
-            <a:off x="6345936" y="2048256"/>
+            <a:off x="5791200" y="2048256"/>
             <a:ext cx="6400800" cy="182880"/>
           </a:xfrm>
           <a:prstGeom prst="rect">
@@ -14182,15 +14703,22 @@
               </a:lnSpc>
             </a:pPr>
             <a:r>
-              <a:rPr sz="800" b="0" i="0" dirty="0">
+              <a:rPr lang="en-US" sz="800" b="0" i="0" dirty="0">
                 <a:solidFill>
                   <a:srgbClr val="44495B"/>
                 </a:solidFill>
                 <a:latin typeface="Segoe UI"/>
                 <a:cs typeface="Segoe UI"/>
               </a:rPr>
-              <a:t>The same configured object accepts documents, images, audio and video, and applies the same settings to everything you send it.</a:t>
-            </a:r>
+              <a:t>The same configured object accepts documents, images, audio and video, and applies the same settings to every file it receives.</a:t>
+            </a:r>
+            <a:endParaRPr sz="800" b="0" i="0" dirty="0">
+              <a:solidFill>
+                <a:srgbClr val="44495B"/>
+              </a:solidFill>
+              <a:latin typeface="Segoe UI"/>
+              <a:cs typeface="Segoe UI"/>
+            </a:endParaRPr>
           </a:p>
         </p:txBody>
       </p:sp>
@@ -14426,15 +14954,22 @@
               </a:lnSpc>
             </a:pPr>
             <a:r>
-              <a:rPr sz="1000" b="1" i="0" dirty="0">
+              <a:rPr lang="en-US" sz="1000" b="1" i="0" dirty="0">
                 <a:solidFill>
                   <a:srgbClr val="101A3C"/>
                 </a:solidFill>
                 <a:latin typeface="Segoe UI"/>
                 <a:cs typeface="Segoe UI"/>
               </a:rPr>
-              <a:t>You define the output schema</a:t>
-            </a:r>
+              <a:t>Output schema defined up front</a:t>
+            </a:r>
+            <a:endParaRPr sz="1000" b="1" i="0" dirty="0">
+              <a:solidFill>
+                <a:srgbClr val="101A3C"/>
+              </a:solidFill>
+              <a:latin typeface="Segoe UI"/>
+              <a:cs typeface="Segoe UI"/>
+            </a:endParaRPr>
           </a:p>
         </p:txBody>
       </p:sp>
@@ -14466,15 +15001,22 @@
               </a:lnSpc>
             </a:pPr>
             <a:r>
-              <a:rPr sz="800" b="0" i="0" dirty="0">
+              <a:rPr lang="en-US" sz="800" b="0" i="0" dirty="0">
                 <a:solidFill>
                   <a:srgbClr val="44495B"/>
                 </a:solidFill>
                 <a:latin typeface="Segoe UI"/>
                 <a:cs typeface="Segoe UI"/>
               </a:rPr>
-              <a:t>Name the fields you want in plain language. The service returns exactly those fields, as typed JSON, alongside readable Markdown.</a:t>
-            </a:r>
+              <a:t>Fields are named in plain language. The service returns exactly those fields, as typed JSON, alongside readable Markdown.</a:t>
+            </a:r>
+            <a:endParaRPr sz="800" b="0" i="0" dirty="0">
+              <a:solidFill>
+                <a:srgbClr val="44495B"/>
+              </a:solidFill>
+              <a:latin typeface="Segoe UI"/>
+              <a:cs typeface="Segoe UI"/>
+            </a:endParaRPr>
           </a:p>
         </p:txBody>
       </p:sp>
@@ -14750,15 +15292,22 @@
               </a:lnSpc>
             </a:pPr>
             <a:r>
-              <a:rPr sz="800" b="0" i="0" dirty="0">
+              <a:rPr lang="en-US" sz="800" b="0" i="0" dirty="0">
                 <a:solidFill>
                   <a:srgbClr val="44495B"/>
                 </a:solidFill>
                 <a:latin typeface="Segoe UI"/>
                 <a:cs typeface="Segoe UI"/>
               </a:rPr>
-              <a:t>Each extracted value carries a score between 0 and 1, so you can route low-scoring cases to a person and pass the rest straight through.</a:t>
-            </a:r>
+              <a:t>Each extracted value carries a score between 0 and 1, so low-scoring cases go to a person and the rest pass straight through.</a:t>
+            </a:r>
+            <a:endParaRPr sz="800" b="0" i="0" dirty="0">
+              <a:solidFill>
+                <a:srgbClr val="44495B"/>
+              </a:solidFill>
+              <a:latin typeface="Segoe UI"/>
+              <a:cs typeface="Segoe UI"/>
+            </a:endParaRPr>
           </a:p>
         </p:txBody>
       </p:sp>
@@ -16068,100 +16617,26 @@
               </a:lnSpc>
             </a:pPr>
             <a:r>
-              <a:rPr sz="1300" b="1" i="0" dirty="0">
+              <a:rPr lang="en-US" sz="1300" b="1" i="0" dirty="0">
                 <a:solidFill>
                   <a:srgbClr val="FFFFFF"/>
                 </a:solidFill>
                 <a:latin typeface="Segoe UI"/>
                 <a:cs typeface="Segoe UI"/>
               </a:rPr>
-              <a:t>Azure Content</a:t>
-            </a:r>
-          </a:p>
-          <a:p>
-            <a:pPr algn="ctr">
-              <a:lnSpc>
-                <a:spcPct val="126000"/>
-              </a:lnSpc>
-            </a:pPr>
-            <a:r>
-              <a:rPr sz="1300" b="1" i="0" dirty="0">
-                <a:solidFill>
-                  <a:srgbClr val="FFFFFF"/>
-                </a:solidFill>
-                <a:latin typeface="Segoe UI"/>
-                <a:cs typeface="Segoe UI"/>
-              </a:rPr>
-              <a:t>Understanding</a:t>
-            </a:r>
-          </a:p>
-          <a:p>
-            <a:pPr algn="ctr">
-              <a:lnSpc>
-                <a:spcPct val="126000"/>
-              </a:lnSpc>
-            </a:pPr>
-            <a:r>
-              <a:rPr sz="750" b="0" i="0" dirty="0">
-                <a:solidFill>
-                  <a:srgbClr val="101A3C"/>
-                </a:solidFill>
-                <a:latin typeface="Segoe UI"/>
-                <a:cs typeface="Segoe UI"/>
-              </a:rPr>
-              <a:t> </a:t>
-            </a:r>
-          </a:p>
-          <a:p>
-            <a:pPr algn="ctr">
-              <a:lnSpc>
-                <a:spcPct val="126000"/>
-              </a:lnSpc>
-            </a:pPr>
-            <a:r>
-              <a:rPr sz="800" b="0" i="0" dirty="0">
-                <a:solidFill>
-                  <a:srgbClr val="B9C2D6"/>
-                </a:solidFill>
-                <a:latin typeface="Segoe UI"/>
-                <a:cs typeface="Segoe UI"/>
-              </a:rPr>
-              <a:t>one analyzer applies the</a:t>
-            </a:r>
-          </a:p>
-          <a:p>
-            <a:pPr algn="ctr">
-              <a:lnSpc>
-                <a:spcPct val="126000"/>
-              </a:lnSpc>
-            </a:pPr>
-            <a:r>
-              <a:rPr sz="800" b="0" i="0" dirty="0">
-                <a:solidFill>
-                  <a:srgbClr val="B9C2D6"/>
-                </a:solidFill>
-                <a:latin typeface="Segoe UI"/>
-                <a:cs typeface="Segoe UI"/>
-              </a:rPr>
-              <a:t>same settings to everything</a:t>
-            </a:r>
-          </a:p>
-          <a:p>
-            <a:pPr algn="ctr">
-              <a:lnSpc>
-                <a:spcPct val="126000"/>
-              </a:lnSpc>
-            </a:pPr>
-            <a:r>
-              <a:rPr sz="800" b="0" i="0" dirty="0">
-                <a:solidFill>
-                  <a:srgbClr val="B9C2D6"/>
-                </a:solidFill>
-                <a:latin typeface="Segoe UI"/>
-                <a:cs typeface="Segoe UI"/>
-              </a:rPr>
-              <a:t>you send it</a:t>
-            </a:r>
+              <a:t>Azure Content
+Understanding
+one analyzer applies the
+same settings to everything
+it receives</a:t>
+            </a:r>
+            <a:endParaRPr sz="800" b="0" i="0" dirty="0">
+              <a:solidFill>
+                <a:srgbClr val="B9C2D6"/>
+              </a:solidFill>
+              <a:latin typeface="Segoe UI"/>
+              <a:cs typeface="Segoe UI"/>
+            </a:endParaRPr>
           </a:p>
         </p:txBody>
       </p:sp>
@@ -16717,15 +17192,22 @@
               </a:lnSpc>
             </a:pPr>
             <a:r>
-              <a:rPr sz="750" b="0" i="0" dirty="0">
+              <a:rPr lang="en-US" sz="750" b="0" i="0" dirty="0">
                 <a:solidFill>
                   <a:srgbClr val="44495B"/>
                 </a:solidFill>
                 <a:latin typeface="Segoe UI"/>
                 <a:cs typeface="Segoe UI"/>
               </a:rPr>
-              <a:t>exactly the schema you defined, with a value, a confidence score and a source region</a:t>
-            </a:r>
+              <a:t>exactly the defined schema, with a value, a confidence score and a source region</a:t>
+            </a:r>
+            <a:endParaRPr sz="750" b="0" i="0" dirty="0">
+              <a:solidFill>
+                <a:srgbClr val="44495B"/>
+              </a:solidFill>
+              <a:latin typeface="Segoe UI"/>
+              <a:cs typeface="Segoe UI"/>
+            </a:endParaRPr>
           </a:p>
         </p:txBody>
       </p:sp>
@@ -16917,15 +17399,22 @@
               </a:lnSpc>
             </a:pPr>
             <a:r>
-              <a:rPr sz="750" b="0" i="0" dirty="0">
+              <a:rPr lang="en-US" sz="750" b="0" i="0" dirty="0">
                 <a:solidFill>
                   <a:srgbClr val="44495B"/>
                 </a:solidFill>
                 <a:latin typeface="Segoe UI"/>
                 <a:cs typeface="Segoe UI"/>
               </a:rPr>
-              <a:t>predictable input for a Foundry agent or your own code</a:t>
-            </a:r>
+              <a:t>predictable input for a Foundry agent or custom code</a:t>
+            </a:r>
+            <a:endParaRPr sz="750" b="0" i="0" dirty="0">
+              <a:solidFill>
+                <a:srgbClr val="44495B"/>
+              </a:solidFill>
+              <a:latin typeface="Segoe UI"/>
+              <a:cs typeface="Segoe UI"/>
+            </a:endParaRPr>
           </a:p>
         </p:txBody>
       </p:sp>
@@ -17350,15 +17839,22 @@
               </a:lnSpc>
             </a:pPr>
             <a:r>
-              <a:rPr sz="1250" b="0" i="0" dirty="0">
+              <a:rPr lang="en-US" sz="1250" b="0" i="0" dirty="0">
                 <a:solidFill>
                   <a:srgbClr val="44495B"/>
                 </a:solidFill>
                 <a:latin typeface="Segoe UI"/>
                 <a:cs typeface="Segoe UI"/>
               </a:rPr>
-              <a:t>Five stages between the file you send and the structured output you get back</a:t>
-            </a:r>
+              <a:t>Five stages between the submitted file and the structured output returned</a:t>
+            </a:r>
+            <a:endParaRPr sz="1250" b="0" i="0" dirty="0">
+              <a:solidFill>
+                <a:srgbClr val="44495B"/>
+              </a:solidFill>
+              <a:latin typeface="Segoe UI"/>
+              <a:cs typeface="Segoe UI"/>
+            </a:endParaRPr>
           </a:p>
         </p:txBody>
       </p:sp>
@@ -17474,32 +17970,23 @@
               </a:lnSpc>
             </a:pPr>
             <a:r>
-              <a:rPr sz="1000" b="1" i="0" dirty="0">
+              <a:rPr lang="en-US" sz="1000" b="1" i="0" dirty="0">
                 <a:solidFill>
                   <a:srgbClr val="FFFFFF"/>
                 </a:solidFill>
                 <a:latin typeface="Segoe UI"/>
                 <a:cs typeface="Segoe UI"/>
               </a:rPr>
-              <a:t>Analyzer  —  the reusable configuration you create once</a:t>
-            </a:r>
-          </a:p>
-          <a:p>
-            <a:pPr algn="ctr">
-              <a:lnSpc>
-                <a:spcPct val="128000"/>
-              </a:lnSpc>
-            </a:pPr>
-            <a:r>
-              <a:rPr sz="800" b="0" i="0" dirty="0">
-                <a:solidFill>
-                  <a:srgbClr val="B9C2D6"/>
-                </a:solidFill>
-                <a:latin typeface="Segoe UI"/>
-                <a:cs typeface="Segoe UI"/>
-              </a:rPr>
-              <a:t>extraction settings   ·   field schema   ·   which Foundry models to use   ·   prebuilt or custom</a:t>
-            </a:r>
+              <a:t>Analyzer  —  the reusable configuration, created once
+extraction settings   ·   field schema   ·   which Foundry models to use   ·   prebuilt or custom</a:t>
+            </a:r>
+            <a:endParaRPr sz="800" b="0" i="0" dirty="0">
+              <a:solidFill>
+                <a:srgbClr val="B9C2D6"/>
+              </a:solidFill>
+              <a:latin typeface="Segoe UI"/>
+              <a:cs typeface="Segoe UI"/>
+            </a:endParaRPr>
           </a:p>
         </p:txBody>
       </p:sp>
@@ -18520,66 +19007,25 @@
               </a:lnSpc>
             </a:pPr>
             <a:r>
-              <a:rPr sz="750" b="0" i="0" dirty="0">
+              <a:rPr lang="en-US" sz="750" b="0" i="0" dirty="0">
                 <a:solidFill>
                   <a:srgbClr val="44495B"/>
                 </a:solidFill>
                 <a:latin typeface="Segoe UI"/>
                 <a:cs typeface="Segoe UI"/>
               </a:rPr>
-              <a:t>produces your schema:</a:t>
-            </a:r>
-          </a:p>
-          <a:p>
-            <a:pPr algn="l">
-              <a:lnSpc>
-                <a:spcPct val="118000"/>
-              </a:lnSpc>
-            </a:pPr>
-            <a:r>
-              <a:rPr sz="750" b="0" i="0" dirty="0">
-                <a:solidFill>
-                  <a:srgbClr val="44495B"/>
-                </a:solidFill>
-                <a:latin typeface="Segoe UI"/>
-                <a:cs typeface="Segoe UI"/>
-              </a:rPr>
-              <a:t>extract, classify</a:t>
-            </a:r>
-          </a:p>
-          <a:p>
-            <a:pPr algn="l">
-              <a:lnSpc>
-                <a:spcPct val="118000"/>
-              </a:lnSpc>
-            </a:pPr>
-            <a:r>
-              <a:rPr sz="750" b="0" i="0" dirty="0">
-                <a:solidFill>
-                  <a:srgbClr val="44495B"/>
-                </a:solidFill>
-                <a:latin typeface="Segoe UI"/>
-                <a:cs typeface="Segoe UI"/>
-              </a:rPr>
-              <a:t>or generate</a:t>
-            </a:r>
-          </a:p>
-          <a:p>
-            <a:pPr algn="l">
-              <a:lnSpc>
-                <a:spcPct val="118000"/>
-              </a:lnSpc>
-            </a:pPr>
-            <a:r>
-              <a:rPr sz="750" b="0" i="0" dirty="0">
-                <a:solidFill>
-                  <a:srgbClr val="44495B"/>
-                </a:solidFill>
-                <a:latin typeface="Segoe UI"/>
-                <a:cs typeface="Segoe UI"/>
-              </a:rPr>
-              <a:t>each field</a:t>
-            </a:r>
+              <a:t>produces the schema:
+extract, classify
+or generate
+each field</a:t>
+            </a:r>
+            <a:endParaRPr sz="750" b="0" i="0" dirty="0">
+              <a:solidFill>
+                <a:srgbClr val="44495B"/>
+              </a:solidFill>
+              <a:latin typeface="Segoe UI"/>
+              <a:cs typeface="Segoe UI"/>
+            </a:endParaRPr>
           </a:p>
         </p:txBody>
       </p:sp>
@@ -19079,32 +19525,23 @@
               </a:lnSpc>
             </a:pPr>
             <a:r>
-              <a:rPr sz="900" b="1" i="0" dirty="0">
+              <a:rPr lang="en-US" sz="900" b="1" i="0" dirty="0">
                 <a:solidFill>
                   <a:srgbClr val="101A3C"/>
                 </a:solidFill>
                 <a:latin typeface="Segoe UI"/>
                 <a:cs typeface="Segoe UI"/>
               </a:rPr>
-              <a:t>Your own Foundry model deployments  ·  a language model and an embedding model</a:t>
-            </a:r>
-          </a:p>
-          <a:p>
-            <a:pPr algn="ctr">
-              <a:lnSpc>
-                <a:spcPct val="122000"/>
-              </a:lnSpc>
-            </a:pPr>
-            <a:r>
-              <a:rPr sz="750" b="0" i="0" dirty="0">
-                <a:solidFill>
-                  <a:srgbClr val="44495B"/>
-                </a:solidFill>
-                <a:latin typeface="Segoe UI"/>
-                <a:cs typeface="Segoe UI"/>
-              </a:rPr>
-              <a:t>you bring these — the analyzer names the model, the resource maps it to your deployment</a:t>
-            </a:r>
+              <a:t>Customer-owned Foundry model deployments  ·  a language model and an embedding model
+brought by the customer — the analyzer names the model, the resource maps it to the deployment</a:t>
+            </a:r>
+            <a:endParaRPr sz="750" b="0" i="0" dirty="0">
+              <a:solidFill>
+                <a:srgbClr val="44495B"/>
+              </a:solidFill>
+              <a:latin typeface="Segoe UI"/>
+              <a:cs typeface="Segoe UI"/>
+            </a:endParaRPr>
           </a:p>
         </p:txBody>
       </p:sp>
@@ -19234,15 +19671,22 @@
               </a:lnSpc>
             </a:pPr>
             <a:r>
-              <a:rPr sz="900" b="0" i="0" dirty="0">
+              <a:rPr lang="en-US" sz="900" b="0" i="0" dirty="0">
                 <a:solidFill>
                   <a:srgbClr val="101A3C"/>
                 </a:solidFill>
                 <a:latin typeface="Segoe UI"/>
                 <a:cs typeface="Segoe UI"/>
               </a:rPr>
-              <a:t>The stage that surprises people is contextualization. It is a distinct billed component, not part of your model cost — and it is where the confidence score and the source region are actually computed.</a:t>
-            </a:r>
+              <a:t>The stage that surprises people is contextualization. It is a distinct billed component, not part of the model cost — and it is where the confidence score and the source region are actually computed.</a:t>
+            </a:r>
+            <a:endParaRPr sz="900" b="0" i="0" dirty="0">
+              <a:solidFill>
+                <a:srgbClr val="101A3C"/>
+              </a:solidFill>
+              <a:latin typeface="Segoe UI"/>
+              <a:cs typeface="Segoe UI"/>
+            </a:endParaRPr>
           </a:p>
         </p:txBody>
       </p:sp>
@@ -19910,15 +20354,22 @@
               </a:lnSpc>
             </a:pPr>
             <a:r>
-              <a:rPr sz="850" b="1" i="0" dirty="0">
+              <a:rPr lang="en-US" sz="850" b="1" i="0" dirty="0">
                 <a:solidFill>
                   <a:srgbClr val="101A3C"/>
                 </a:solidFill>
                 <a:latin typeface="Segoe UI"/>
                 <a:cs typeface="Segoe UI"/>
               </a:rPr>
-              <a:t>Your application</a:t>
-            </a:r>
+              <a:t>Client application</a:t>
+            </a:r>
+            <a:endParaRPr sz="850" b="1" i="0" dirty="0">
+              <a:solidFill>
+                <a:srgbClr val="101A3C"/>
+              </a:solidFill>
+              <a:latin typeface="Segoe UI"/>
+              <a:cs typeface="Segoe UI"/>
+            </a:endParaRPr>
           </a:p>
         </p:txBody>
       </p:sp>
@@ -20659,15 +21110,22 @@
               </a:lnSpc>
             </a:pPr>
             <a:r>
-              <a:rPr sz="850" b="1" i="0" dirty="0">
+              <a:rPr lang="en-US" sz="850" b="1" i="0" dirty="0">
                 <a:solidFill>
                   <a:srgbClr val="101A3C"/>
                 </a:solidFill>
                 <a:latin typeface="Segoe UI"/>
                 <a:cs typeface="Segoe UI"/>
               </a:rPr>
-              <a:t>Your application</a:t>
-            </a:r>
+              <a:t>Client application</a:t>
+            </a:r>
+            <a:endParaRPr sz="850" b="1" i="0" dirty="0">
+              <a:solidFill>
+                <a:srgbClr val="101A3C"/>
+              </a:solidFill>
+              <a:latin typeface="Segoe UI"/>
+              <a:cs typeface="Segoe UI"/>
+            </a:endParaRPr>
           </a:p>
         </p:txBody>
       </p:sp>
@@ -21468,15 +21926,22 @@
               </a:lnSpc>
             </a:pPr>
             <a:r>
-              <a:rPr sz="850" b="0" i="0" dirty="0">
+              <a:rPr lang="en-US" sz="850" b="0" i="0" dirty="0">
                 <a:solidFill>
                   <a:srgbClr val="44495B"/>
                 </a:solidFill>
                 <a:latin typeface="Segoe UI"/>
                 <a:cs typeface="Segoe UI"/>
               </a:rPr>
-              <a:t>Yes — your schema, with confidence and source</a:t>
-            </a:r>
+              <a:t>Yes — the defined schema, with confidence and source</a:t>
+            </a:r>
+            <a:endParaRPr sz="850" b="0" i="0" dirty="0">
+              <a:solidFill>
+                <a:srgbClr val="44495B"/>
+              </a:solidFill>
+              <a:latin typeface="Segoe UI"/>
+              <a:cs typeface="Segoe UI"/>
+            </a:endParaRPr>
           </a:p>
         </p:txBody>
       </p:sp>
@@ -22067,15 +22532,22 @@
               </a:lnSpc>
             </a:pPr>
             <a:r>
-              <a:rPr sz="2600" b="1" i="0" dirty="0">
+              <a:rPr lang="en-US" sz="2600" b="1" i="0" dirty="0">
                 <a:solidFill>
                   <a:srgbClr val="101A3C"/>
                 </a:solidFill>
                 <a:latin typeface="Segoe UI"/>
                 <a:cs typeface="Segoe UI"/>
               </a:rPr>
-              <a:t>What changed in 2026, and what you can rely on</a:t>
-            </a:r>
+              <a:t>Changes in 2026 and release status</a:t>
+            </a:r>
+            <a:endParaRPr sz="2600" b="1" i="0" dirty="0">
+              <a:solidFill>
+                <a:srgbClr val="101A3C"/>
+              </a:solidFill>
+              <a:latin typeface="Segoe UI"/>
+              <a:cs typeface="Segoe UI"/>
+            </a:endParaRPr>
           </a:p>
         </p:txBody>
       </p:sp>
@@ -24725,32 +25197,23 @@
               </a:lnSpc>
             </a:pPr>
             <a:r>
-              <a:rPr sz="750" b="0" i="0" dirty="0">
+              <a:rPr lang="en-US" sz="750" b="0" i="0" dirty="0">
                 <a:solidFill>
                   <a:srgbClr val="44495B"/>
                 </a:solidFill>
                 <a:latin typeface="Segoe UI"/>
                 <a:cs typeface="Segoe UI"/>
               </a:rPr>
-              <a:t>checks values against</a:t>
-            </a:r>
-          </a:p>
-          <a:p>
-            <a:pPr algn="l">
-              <a:lnSpc>
-                <a:spcPct val="112000"/>
-              </a:lnSpc>
-            </a:pPr>
-            <a:r>
-              <a:rPr sz="750" b="0" i="0" dirty="0">
-                <a:solidFill>
-                  <a:srgbClr val="44495B"/>
-                </a:solidFill>
-                <a:latin typeface="Segoe UI"/>
-                <a:cs typeface="Segoe UI"/>
-              </a:rPr>
-              <a:t>your conditions</a:t>
-            </a:r>
+              <a:t>checks values against
+defined conditions</a:t>
+            </a:r>
+            <a:endParaRPr sz="750" b="0" i="0" dirty="0">
+              <a:solidFill>
+                <a:srgbClr val="44495B"/>
+              </a:solidFill>
+              <a:latin typeface="Segoe UI"/>
+              <a:cs typeface="Segoe UI"/>
+            </a:endParaRPr>
           </a:p>
         </p:txBody>
       </p:sp>
@@ -25044,66 +25507,25 @@
               </a:lnSpc>
             </a:pPr>
             <a:r>
-              <a:rPr sz="1000" b="1" i="0" dirty="0">
+              <a:rPr lang="en-US" sz="1000" b="1" i="0" dirty="0">
                 <a:solidFill>
                   <a:srgbClr val="101A3C"/>
                 </a:solidFill>
                 <a:latin typeface="Segoe UI"/>
                 <a:cs typeface="Segoe UI"/>
               </a:rPr>
-              <a:t>Your schema</a:t>
-            </a:r>
-          </a:p>
-          <a:p>
-            <a:pPr algn="ctr">
-              <a:lnSpc>
-                <a:spcPct val="120000"/>
-              </a:lnSpc>
-            </a:pPr>
-            <a:r>
-              <a:rPr sz="750" b="0" i="0" dirty="0">
-                <a:solidFill>
-                  <a:srgbClr val="44495B"/>
-                </a:solidFill>
-                <a:latin typeface="Segoe UI"/>
-                <a:cs typeface="Segoe UI"/>
-              </a:rPr>
-              <a:t>the same typed JSON fields</a:t>
-            </a:r>
-          </a:p>
-          <a:p>
-            <a:pPr algn="ctr">
-              <a:lnSpc>
-                <a:spcPct val="120000"/>
-              </a:lnSpc>
-            </a:pPr>
-            <a:r>
-              <a:rPr sz="750" b="0" i="0" dirty="0">
-                <a:solidFill>
-                  <a:srgbClr val="44495B"/>
-                </a:solidFill>
-                <a:latin typeface="Segoe UI"/>
-                <a:cs typeface="Segoe UI"/>
-              </a:rPr>
-              <a:t>a standard analyzer returns —</a:t>
-            </a:r>
-          </a:p>
-          <a:p>
-            <a:pPr algn="ctr">
-              <a:lnSpc>
-                <a:spcPct val="120000"/>
-              </a:lnSpc>
-            </a:pPr>
-            <a:r>
-              <a:rPr sz="750" b="0" i="0" dirty="0">
-                <a:solidFill>
-                  <a:srgbClr val="44495B"/>
-                </a:solidFill>
-                <a:latin typeface="Segoe UI"/>
-                <a:cs typeface="Segoe UI"/>
-              </a:rPr>
-              <a:t>the reasoning is internal</a:t>
-            </a:r>
+              <a:t>Defined schema
+the same typed JSON fields
+a standard analyzer returns —
+the reasoning is internal</a:t>
+            </a:r>
+            <a:endParaRPr sz="750" b="0" i="0" dirty="0">
+              <a:solidFill>
+                <a:srgbClr val="44495B"/>
+              </a:solidFill>
+              <a:latin typeface="Segoe UI"/>
+              <a:cs typeface="Segoe UI"/>
+            </a:endParaRPr>
           </a:p>
         </p:txBody>
       </p:sp>
@@ -25391,15 +25813,22 @@
               </a:lnSpc>
             </a:pPr>
             <a:r>
-              <a:rPr sz="800" b="1" i="0" spc="120" dirty="0">
+              <a:rPr lang="en-US" sz="800" b="1" i="0" spc="120" dirty="0">
                 <a:solidFill>
                   <a:srgbClr val="008173"/>
                 </a:solidFill>
                 <a:latin typeface="Segoe UI"/>
                 <a:cs typeface="Segoe UI"/>
               </a:rPr>
-              <a:t>WHAT IT COSTS YOU</a:t>
-            </a:r>
+              <a:t>COST AND CAPACITY</a:t>
+            </a:r>
+            <a:endParaRPr sz="800" b="1" i="0" spc="120" dirty="0">
+              <a:solidFill>
+                <a:srgbClr val="008173"/>
+              </a:solidFill>
+              <a:latin typeface="Segoe UI"/>
+              <a:cs typeface="Segoe UI"/>
+            </a:endParaRPr>
           </a:p>
         </p:txBody>
       </p:sp>
@@ -25587,15 +26016,22 @@
               </a:lnSpc>
             </a:pPr>
             <a:r>
-              <a:rPr sz="800" b="0" i="0" dirty="0">
+              <a:rPr lang="en-US" sz="800" b="0" i="0" dirty="0">
                 <a:solidFill>
                   <a:srgbClr val="44495B"/>
                 </a:solidFill>
                 <a:latin typeface="Segoe UI"/>
                 <a:cs typeface="Segoe UI"/>
               </a:rPr>
-              <a:t>more than a standard workflow, on your own deployment</a:t>
-            </a:r>
+              <a:t>more than a standard workflow, on the customer’s own deployment</a:t>
+            </a:r>
+            <a:endParaRPr sz="800" b="0" i="0" dirty="0">
+              <a:solidFill>
+                <a:srgbClr val="44495B"/>
+              </a:solidFill>
+              <a:latin typeface="Segoe UI"/>
+              <a:cs typeface="Segoe UI"/>
+            </a:endParaRPr>
           </a:p>
         </p:txBody>
       </p:sp>
@@ -25955,15 +26391,22 @@
               </a:lnSpc>
             </a:pPr>
             <a:r>
-              <a:rPr sz="900" b="0" i="0" dirty="0">
+              <a:rPr lang="en-US" sz="900" b="0" i="0" dirty="0">
                 <a:solidFill>
                   <a:srgbClr val="101A3C"/>
                 </a:solidFill>
                 <a:latin typeface="Segoe UI"/>
                 <a:cs typeface="Segoe UI"/>
               </a:rPr>
-              <a:t>Turn it on with one setting when you create the analyzer: config.workflow set to agentic. Everything else — the schema, the call, the result shape — stays the same.</a:t>
-            </a:r>
+              <a:t>Enabled with one setting when the analyzer is created: config.workflow set to agentic. Everything else — the schema, the call, the result shape — stays the same.</a:t>
+            </a:r>
+            <a:endParaRPr sz="900" b="0" i="0" dirty="0">
+              <a:solidFill>
+                <a:srgbClr val="101A3C"/>
+              </a:solidFill>
+              <a:latin typeface="Segoe UI"/>
+              <a:cs typeface="Segoe UI"/>
+            </a:endParaRPr>
           </a:p>
         </p:txBody>
       </p:sp>
@@ -26330,15 +26773,22 @@
               </a:lnSpc>
             </a:pPr>
             <a:r>
-              <a:rPr sz="1000" b="0" i="0" dirty="0">
+              <a:rPr lang="en-US" sz="1000" b="0" i="0" dirty="0">
                 <a:solidFill>
                   <a:srgbClr val="FFFFFF"/>
                 </a:solidFill>
                 <a:latin typeface="Segoe UI"/>
                 <a:cs typeface="Segoe UI"/>
               </a:rPr>
-              <a:t>The problem it solves: a description in plain language is often enough, but not always. When a new vendor’s layout or an unfamiliar format produces wrong values or low confidence, you need a way to show the analyzer what right looks like.</a:t>
-            </a:r>
+              <a:t>The problem it solves: a description in plain language is often enough, but not always. When a new vendor’s layout or an unfamiliar format produces wrong values or low confidence, the analyzer needs examples of what right looks like.</a:t>
+            </a:r>
+            <a:endParaRPr sz="1000" b="0" i="0" dirty="0">
+              <a:solidFill>
+                <a:srgbClr val="FFFFFF"/>
+              </a:solidFill>
+              <a:latin typeface="Segoe UI"/>
+              <a:cs typeface="Segoe UI"/>
+            </a:endParaRPr>
           </a:p>
         </p:txBody>
       </p:sp>
@@ -27337,15 +27787,22 @@
               </a:lnSpc>
             </a:pPr>
             <a:r>
-              <a:rPr sz="750" b="0" i="1" dirty="0">
+              <a:rPr lang="en-US" sz="750" b="0" i="1" dirty="0">
                 <a:solidFill>
                   <a:srgbClr val="44495B"/>
                 </a:solidFill>
                 <a:latin typeface="Segoe UI"/>
                 <a:cs typeface="Segoe UI"/>
               </a:rPr>
-              <a:t>How many samples: one is enough when the templates barely vary; add one per format when they do. Evaluate quality before and after, so you can see whether the samples actually helped.</a:t>
-            </a:r>
+              <a:t>How many samples: one is enough when the templates barely vary; add one per format when they do. Evaluate quality before and after, to see whether the samples actually helped.</a:t>
+            </a:r>
+            <a:endParaRPr sz="750" b="0" i="1" dirty="0">
+              <a:solidFill>
+                <a:srgbClr val="44495B"/>
+              </a:solidFill>
+              <a:latin typeface="Segoe UI"/>
+              <a:cs typeface="Segoe UI"/>
+            </a:endParaRPr>
           </a:p>
         </p:txBody>
       </p:sp>
@@ -28374,15 +28831,22 @@
               </a:lnSpc>
             </a:pPr>
             <a:r>
-              <a:rPr sz="850" b="0" i="0" dirty="0">
+              <a:rPr lang="en-US" sz="850" b="0" i="0" dirty="0">
                 <a:solidFill>
                   <a:srgbClr val="101A3C"/>
                 </a:solidFill>
                 <a:latin typeface="Segoe UI"/>
                 <a:cs typeface="Segoe UI"/>
               </a:rPr>
-              <a:t>Your labelled documents stay in the storage account of your Content Understanding Studio project, for design purposes only.</a:t>
-            </a:r>
+              <a:t>Labelled documents stay in the storage account of the Content Understanding Studio project, for design purposes only.</a:t>
+            </a:r>
+            <a:endParaRPr sz="850" b="0" i="0" dirty="0">
+              <a:solidFill>
+                <a:srgbClr val="101A3C"/>
+              </a:solidFill>
+              <a:latin typeface="Segoe UI"/>
+              <a:cs typeface="Segoe UI"/>
+            </a:endParaRPr>
           </a:p>
         </p:txBody>
       </p:sp>
